--- a/figures/ppt/研究体系.pptx
+++ b/figures/ppt/研究体系.pptx
@@ -4,6 +4,9 @@
   <p:sldMasterIdLst>
     <p:sldMasterId id="2147483648" r:id="rId1"/>
   </p:sldMasterIdLst>
+  <p:notesMasterIdLst>
+    <p:notesMasterId r:id="rId4"/>
+  </p:notesMasterIdLst>
   <p:sldIdLst>
     <p:sldId id="256" r:id="rId3"/>
   </p:sldIdLst>
@@ -121,6 +124,401 @@
     </p:ext>
   </p:extLst>
 </p:presentation>
+</file>
+
+<file path=ppt/notesMasters/notesMaster1.xml><?xml version="1.0" encoding="utf-8"?>
+<p:notesMaster xmlns:a="http://schemas.openxmlformats.org/drawingml/2006/main" xmlns:r="http://schemas.openxmlformats.org/officeDocument/2006/relationships" xmlns:p="http://schemas.openxmlformats.org/presentationml/2006/main">
+  <p:cSld>
+    <p:bg>
+      <p:bgRef idx="1001">
+        <a:schemeClr val="bg1"/>
+      </p:bgRef>
+    </p:bg>
+    <p:spTree>
+      <p:nvGrpSpPr>
+        <p:cNvPr id="1" name=""/>
+        <p:cNvGrpSpPr/>
+        <p:nvPr/>
+      </p:nvGrpSpPr>
+      <p:grpSpPr>
+        <a:xfrm>
+          <a:off x="0" y="0"/>
+          <a:ext cx="0" cy="0"/>
+          <a:chOff x="0" y="0"/>
+          <a:chExt cx="0" cy="0"/>
+        </a:xfrm>
+      </p:grpSpPr>
+      <p:sp>
+        <p:nvSpPr>
+          <p:cNvPr id="2" name="页眉占位符 1"/>
+          <p:cNvSpPr>
+            <a:spLocks noGrp="1"/>
+          </p:cNvSpPr>
+          <p:nvPr>
+            <p:ph type="hdr" sz="quarter"/>
+          </p:nvPr>
+        </p:nvSpPr>
+        <p:spPr>
+          <a:xfrm>
+            <a:off x="0" y="0"/>
+            <a:ext cx="2971800" cy="458788"/>
+          </a:xfrm>
+          <a:prstGeom prst="rect">
+            <a:avLst/>
+          </a:prstGeom>
+        </p:spPr>
+        <p:txBody>
+          <a:bodyPr vert="horz" lIns="91440" tIns="45720" rIns="91440" bIns="45720" rtlCol="0"/>
+          <a:lstStyle>
+            <a:lvl1pPr algn="l">
+              <a:defRPr sz="1200"/>
+            </a:lvl1pPr>
+          </a:lstStyle>
+          <a:p>
+            <a:endParaRPr lang="zh-CN" altLang="en-US"/>
+          </a:p>
+        </p:txBody>
+      </p:sp>
+      <p:sp>
+        <p:nvSpPr>
+          <p:cNvPr id="3" name="日期占位符 2"/>
+          <p:cNvSpPr>
+            <a:spLocks noGrp="1"/>
+          </p:cNvSpPr>
+          <p:nvPr>
+            <p:ph type="dt" idx="1"/>
+          </p:nvPr>
+        </p:nvSpPr>
+        <p:spPr>
+          <a:xfrm>
+            <a:off x="3884613" y="0"/>
+            <a:ext cx="2971800" cy="458788"/>
+          </a:xfrm>
+          <a:prstGeom prst="rect">
+            <a:avLst/>
+          </a:prstGeom>
+        </p:spPr>
+        <p:txBody>
+          <a:bodyPr vert="horz" lIns="91440" tIns="45720" rIns="91440" bIns="45720" rtlCol="0"/>
+          <a:lstStyle>
+            <a:lvl1pPr algn="r">
+              <a:defRPr sz="1200"/>
+            </a:lvl1pPr>
+          </a:lstStyle>
+          <a:p>
+            <a:fld id="{D2A48B96-639E-45A3-A0BA-2464DFDB1FAA}" type="datetimeFigureOut">
+              <a:rPr lang="zh-CN" altLang="en-US" smtClean="0"/>
+            </a:fld>
+            <a:endParaRPr lang="zh-CN" altLang="en-US"/>
+          </a:p>
+        </p:txBody>
+      </p:sp>
+      <p:sp>
+        <p:nvSpPr>
+          <p:cNvPr id="4" name="幻灯片图像占位符 3"/>
+          <p:cNvSpPr>
+            <a:spLocks noGrp="1" noRot="1" noChangeAspect="1"/>
+          </p:cNvSpPr>
+          <p:nvPr>
+            <p:ph type="sldImg" idx="2"/>
+          </p:nvPr>
+        </p:nvSpPr>
+        <p:spPr>
+          <a:xfrm>
+            <a:off x="685800" y="1143000"/>
+            <a:ext cx="5486400" cy="3086100"/>
+          </a:xfrm>
+          <a:prstGeom prst="rect">
+            <a:avLst/>
+          </a:prstGeom>
+          <a:noFill/>
+          <a:ln w="12700">
+            <a:solidFill>
+              <a:prstClr val="black"/>
+            </a:solidFill>
+          </a:ln>
+        </p:spPr>
+        <p:txBody>
+          <a:bodyPr vert="horz" lIns="91440" tIns="45720" rIns="91440" bIns="45720" rtlCol="0" anchor="ctr"/>
+          <a:lstStyle/>
+          <a:p>
+            <a:endParaRPr lang="zh-CN" altLang="en-US"/>
+          </a:p>
+        </p:txBody>
+      </p:sp>
+      <p:sp>
+        <p:nvSpPr>
+          <p:cNvPr id="5" name="备注占位符 4"/>
+          <p:cNvSpPr>
+            <a:spLocks noGrp="1"/>
+          </p:cNvSpPr>
+          <p:nvPr>
+            <p:ph type="body" sz="quarter" idx="3"/>
+          </p:nvPr>
+        </p:nvSpPr>
+        <p:spPr>
+          <a:xfrm>
+            <a:off x="685800" y="4400550"/>
+            <a:ext cx="5486400" cy="3600450"/>
+          </a:xfrm>
+          <a:prstGeom prst="rect">
+            <a:avLst/>
+          </a:prstGeom>
+        </p:spPr>
+        <p:txBody>
+          <a:bodyPr vert="horz" lIns="91440" tIns="45720" rIns="91440" bIns="45720" rtlCol="0"/>
+          <a:lstStyle/>
+          <a:p>
+            <a:pPr lvl="0"/>
+            <a:r>
+              <a:rPr lang="zh-CN" altLang="en-US" smtClean="0"/>
+              <a:t>单击此处编辑母版文本样式</a:t>
+            </a:r>
+            <a:endParaRPr lang="zh-CN" altLang="en-US" smtClean="0"/>
+          </a:p>
+          <a:p>
+            <a:pPr lvl="1"/>
+            <a:r>
+              <a:rPr lang="zh-CN" altLang="en-US" smtClean="0"/>
+              <a:t>第二级</a:t>
+            </a:r>
+            <a:endParaRPr lang="zh-CN" altLang="en-US" smtClean="0"/>
+          </a:p>
+          <a:p>
+            <a:pPr lvl="2"/>
+            <a:r>
+              <a:rPr lang="zh-CN" altLang="en-US" smtClean="0"/>
+              <a:t>第三级</a:t>
+            </a:r>
+            <a:endParaRPr lang="zh-CN" altLang="en-US" smtClean="0"/>
+          </a:p>
+          <a:p>
+            <a:pPr lvl="3"/>
+            <a:r>
+              <a:rPr lang="zh-CN" altLang="en-US" smtClean="0"/>
+              <a:t>第四级</a:t>
+            </a:r>
+            <a:endParaRPr lang="zh-CN" altLang="en-US" smtClean="0"/>
+          </a:p>
+          <a:p>
+            <a:pPr lvl="4"/>
+            <a:r>
+              <a:rPr lang="zh-CN" altLang="en-US" smtClean="0"/>
+              <a:t>第五级</a:t>
+            </a:r>
+            <a:endParaRPr lang="zh-CN" altLang="en-US"/>
+          </a:p>
+        </p:txBody>
+      </p:sp>
+      <p:sp>
+        <p:nvSpPr>
+          <p:cNvPr id="6" name="页脚占位符 5"/>
+          <p:cNvSpPr>
+            <a:spLocks noGrp="1"/>
+          </p:cNvSpPr>
+          <p:nvPr>
+            <p:ph type="ftr" sz="quarter" idx="4"/>
+          </p:nvPr>
+        </p:nvSpPr>
+        <p:spPr>
+          <a:xfrm>
+            <a:off x="0" y="8685213"/>
+            <a:ext cx="2971800" cy="458787"/>
+          </a:xfrm>
+          <a:prstGeom prst="rect">
+            <a:avLst/>
+          </a:prstGeom>
+        </p:spPr>
+        <p:txBody>
+          <a:bodyPr vert="horz" lIns="91440" tIns="45720" rIns="91440" bIns="45720" rtlCol="0" anchor="b"/>
+          <a:lstStyle>
+            <a:lvl1pPr algn="l">
+              <a:defRPr sz="1200"/>
+            </a:lvl1pPr>
+          </a:lstStyle>
+          <a:p>
+            <a:endParaRPr lang="zh-CN" altLang="en-US"/>
+          </a:p>
+        </p:txBody>
+      </p:sp>
+      <p:sp>
+        <p:nvSpPr>
+          <p:cNvPr id="7" name="灯片编号占位符 6"/>
+          <p:cNvSpPr>
+            <a:spLocks noGrp="1"/>
+          </p:cNvSpPr>
+          <p:nvPr>
+            <p:ph type="sldNum" sz="quarter" idx="5"/>
+          </p:nvPr>
+        </p:nvSpPr>
+        <p:spPr>
+          <a:xfrm>
+            <a:off x="3884613" y="8685213"/>
+            <a:ext cx="2971800" cy="458787"/>
+          </a:xfrm>
+          <a:prstGeom prst="rect">
+            <a:avLst/>
+          </a:prstGeom>
+        </p:spPr>
+        <p:txBody>
+          <a:bodyPr vert="horz" lIns="91440" tIns="45720" rIns="91440" bIns="45720" rtlCol="0" anchor="b"/>
+          <a:lstStyle>
+            <a:lvl1pPr algn="r">
+              <a:defRPr sz="1200"/>
+            </a:lvl1pPr>
+          </a:lstStyle>
+          <a:p>
+            <a:fld id="{A6837353-30EB-4A48-80EB-173D804AEFBD}" type="slidenum">
+              <a:rPr lang="zh-CN" altLang="en-US" smtClean="0"/>
+            </a:fld>
+            <a:endParaRPr lang="zh-CN" altLang="en-US"/>
+          </a:p>
+        </p:txBody>
+      </p:sp>
+    </p:spTree>
+  </p:cSld>
+  <p:clrMap bg1="lt1" tx1="dk1" bg2="lt2" tx2="dk2" accent1="accent1" accent2="accent2" accent3="accent3" accent4="accent4" accent5="accent5" accent6="accent6" hlink="hlink" folHlink="folHlink"/>
+  <p:notesStyle>
+    <a:lvl1pPr marL="0" algn="l" defTabSz="914400" rtl="0" eaLnBrk="1" latinLnBrk="0" hangingPunct="1">
+      <a:defRPr sz="1200" kern="1200">
+        <a:solidFill>
+          <a:schemeClr val="tx1"/>
+        </a:solidFill>
+        <a:latin typeface="+mn-lt"/>
+        <a:ea typeface="+mn-ea"/>
+        <a:cs typeface="+mn-cs"/>
+      </a:defRPr>
+    </a:lvl1pPr>
+    <a:lvl2pPr marL="457200" algn="l" defTabSz="914400" rtl="0" eaLnBrk="1" latinLnBrk="0" hangingPunct="1">
+      <a:defRPr sz="1200" kern="1200">
+        <a:solidFill>
+          <a:schemeClr val="tx1"/>
+        </a:solidFill>
+        <a:latin typeface="+mn-lt"/>
+        <a:ea typeface="+mn-ea"/>
+        <a:cs typeface="+mn-cs"/>
+      </a:defRPr>
+    </a:lvl2pPr>
+    <a:lvl3pPr marL="914400" algn="l" defTabSz="914400" rtl="0" eaLnBrk="1" latinLnBrk="0" hangingPunct="1">
+      <a:defRPr sz="1200" kern="1200">
+        <a:solidFill>
+          <a:schemeClr val="tx1"/>
+        </a:solidFill>
+        <a:latin typeface="+mn-lt"/>
+        <a:ea typeface="+mn-ea"/>
+        <a:cs typeface="+mn-cs"/>
+      </a:defRPr>
+    </a:lvl3pPr>
+    <a:lvl4pPr marL="1371600" algn="l" defTabSz="914400" rtl="0" eaLnBrk="1" latinLnBrk="0" hangingPunct="1">
+      <a:defRPr sz="1200" kern="1200">
+        <a:solidFill>
+          <a:schemeClr val="tx1"/>
+        </a:solidFill>
+        <a:latin typeface="+mn-lt"/>
+        <a:ea typeface="+mn-ea"/>
+        <a:cs typeface="+mn-cs"/>
+      </a:defRPr>
+    </a:lvl4pPr>
+    <a:lvl5pPr marL="1828800" algn="l" defTabSz="914400" rtl="0" eaLnBrk="1" latinLnBrk="0" hangingPunct="1">
+      <a:defRPr sz="1200" kern="1200">
+        <a:solidFill>
+          <a:schemeClr val="tx1"/>
+        </a:solidFill>
+        <a:latin typeface="+mn-lt"/>
+        <a:ea typeface="+mn-ea"/>
+        <a:cs typeface="+mn-cs"/>
+      </a:defRPr>
+    </a:lvl5pPr>
+    <a:lvl6pPr marL="2286000" algn="l" defTabSz="914400" rtl="0" eaLnBrk="1" latinLnBrk="0" hangingPunct="1">
+      <a:defRPr sz="1200" kern="1200">
+        <a:solidFill>
+          <a:schemeClr val="tx1"/>
+        </a:solidFill>
+        <a:latin typeface="+mn-lt"/>
+        <a:ea typeface="+mn-ea"/>
+        <a:cs typeface="+mn-cs"/>
+      </a:defRPr>
+    </a:lvl6pPr>
+    <a:lvl7pPr marL="2743200" algn="l" defTabSz="914400" rtl="0" eaLnBrk="1" latinLnBrk="0" hangingPunct="1">
+      <a:defRPr sz="1200" kern="1200">
+        <a:solidFill>
+          <a:schemeClr val="tx1"/>
+        </a:solidFill>
+        <a:latin typeface="+mn-lt"/>
+        <a:ea typeface="+mn-ea"/>
+        <a:cs typeface="+mn-cs"/>
+      </a:defRPr>
+    </a:lvl7pPr>
+    <a:lvl8pPr marL="3200400" algn="l" defTabSz="914400" rtl="0" eaLnBrk="1" latinLnBrk="0" hangingPunct="1">
+      <a:defRPr sz="1200" kern="1200">
+        <a:solidFill>
+          <a:schemeClr val="tx1"/>
+        </a:solidFill>
+        <a:latin typeface="+mn-lt"/>
+        <a:ea typeface="+mn-ea"/>
+        <a:cs typeface="+mn-cs"/>
+      </a:defRPr>
+    </a:lvl8pPr>
+    <a:lvl9pPr marL="3657600" algn="l" defTabSz="914400" rtl="0" eaLnBrk="1" latinLnBrk="0" hangingPunct="1">
+      <a:defRPr sz="1200" kern="1200">
+        <a:solidFill>
+          <a:schemeClr val="tx1"/>
+        </a:solidFill>
+        <a:latin typeface="+mn-lt"/>
+        <a:ea typeface="+mn-ea"/>
+        <a:cs typeface="+mn-cs"/>
+      </a:defRPr>
+    </a:lvl9pPr>
+  </p:notesStyle>
+</p:notesMaster>
+</file>
+
+<file path=ppt/notesSlides/notesSlide1.xml><?xml version="1.0" encoding="utf-8"?>
+<p:notes xmlns:a="http://schemas.openxmlformats.org/drawingml/2006/main" xmlns:r="http://schemas.openxmlformats.org/officeDocument/2006/relationships" xmlns:p="http://schemas.openxmlformats.org/presentationml/2006/main">
+  <p:cSld>
+    <p:spTree>
+      <p:nvGrpSpPr>
+        <p:cNvPr id="1" name=""/>
+        <p:cNvGrpSpPr/>
+        <p:nvPr/>
+      </p:nvGrpSpPr>
+      <p:grpSpPr/>
+      <p:sp>
+        <p:nvSpPr>
+          <p:cNvPr id="2" name="幻灯片图像占位符 1"/>
+          <p:cNvSpPr>
+            <a:spLocks noGrp="1"/>
+          </p:cNvSpPr>
+          <p:nvPr>
+            <p:ph type="sldImg" idx="2"/>
+          </p:nvPr>
+        </p:nvSpPr>
+        <p:spPr/>
+      </p:sp>
+      <p:sp>
+        <p:nvSpPr>
+          <p:cNvPr id="3" name="文本占位符 2"/>
+          <p:cNvSpPr>
+            <a:spLocks noGrp="1"/>
+          </p:cNvSpPr>
+          <p:nvPr>
+            <p:ph type="body" idx="3"/>
+          </p:nvPr>
+        </p:nvSpPr>
+        <p:spPr/>
+        <p:txBody>
+          <a:bodyPr/>
+          <a:p>
+            <a:endParaRPr lang="zh-CN" altLang="en-US"/>
+          </a:p>
+        </p:txBody>
+      </p:sp>
+    </p:spTree>
+  </p:cSld>
+  <p:clrMapOvr>
+    <a:masterClrMapping/>
+  </p:clrMapOvr>
+</p:notes>
 </file>
 
 <file path=ppt/slideLayouts/slideLayout1.xml><?xml version="1.0" encoding="utf-8"?>
@@ -2930,6 +3328,226 @@
         <p:nvPr/>
       </p:nvGrpSpPr>
       <p:grpSpPr/>
+      <p:sp>
+        <p:nvSpPr>
+          <p:cNvPr id="4" name="矩形 3"/>
+          <p:cNvSpPr/>
+          <p:nvPr/>
+        </p:nvSpPr>
+        <p:spPr>
+          <a:xfrm>
+            <a:off x="2789555" y="702945"/>
+            <a:ext cx="5760720" cy="454025"/>
+          </a:xfrm>
+          <a:prstGeom prst="rect">
+            <a:avLst/>
+          </a:prstGeom>
+          <a:noFill/>
+          <a:ln>
+            <a:solidFill>
+              <a:schemeClr val="tx1"/>
+            </a:solidFill>
+          </a:ln>
+        </p:spPr>
+        <p:style>
+          <a:lnRef idx="2">
+            <a:schemeClr val="accent1">
+              <a:lumMod val="75000"/>
+            </a:schemeClr>
+          </a:lnRef>
+          <a:fillRef idx="1">
+            <a:schemeClr val="accent1"/>
+          </a:fillRef>
+          <a:effectRef idx="0">
+            <a:srgbClr val="FFFFFF"/>
+          </a:effectRef>
+          <a:fontRef idx="minor">
+            <a:schemeClr val="lt1"/>
+          </a:fontRef>
+        </p:style>
+        <p:txBody>
+          <a:bodyPr rtlCol="0" anchor="ctr"/>
+          <a:p>
+            <a:pPr algn="ctr"/>
+            <a:endParaRPr lang="zh-CN" altLang="en-US"/>
+          </a:p>
+        </p:txBody>
+      </p:sp>
+      <p:sp>
+        <p:nvSpPr>
+          <p:cNvPr id="5" name="文本框 4"/>
+          <p:cNvSpPr txBox="1"/>
+          <p:nvPr/>
+        </p:nvSpPr>
+        <p:spPr>
+          <a:xfrm>
+            <a:off x="3237865" y="744855"/>
+            <a:ext cx="4863465" cy="337185"/>
+          </a:xfrm>
+          <a:prstGeom prst="rect">
+            <a:avLst/>
+          </a:prstGeom>
+        </p:spPr>
+        <p:txBody>
+          <a:bodyPr wrap="square">
+            <a:spAutoFit/>
+          </a:bodyPr>
+          <a:p>
+            <a:r>
+              <a:rPr lang="zh-CN" altLang="en-US" sz="1600" b="1"/>
+              <a:t>端到端 </a:t>
+            </a:r>
+            <a:r>
+              <a:rPr lang="en-US" altLang="zh-CN" sz="1600" b="1"/>
+              <a:t>QoS </a:t>
+            </a:r>
+            <a:r>
+              <a:rPr lang="zh-CN" altLang="en-US" sz="1600" b="1"/>
+              <a:t>保障的</a:t>
+            </a:r>
+            <a:r>
+              <a:rPr lang="en-US" altLang="zh-CN" sz="1600" b="1">
+                <a:sym typeface="+mn-ea"/>
+              </a:rPr>
+              <a:t>LEO</a:t>
+            </a:r>
+            <a:r>
+              <a:rPr lang="zh-CN" altLang="en-US" sz="1600" b="1">
+                <a:sym typeface="+mn-ea"/>
+              </a:rPr>
+              <a:t>卫星</a:t>
+            </a:r>
+            <a:r>
+              <a:rPr lang="zh-CN" altLang="en-US" sz="1600" b="1"/>
+              <a:t>分布式协同资源管控研究</a:t>
+            </a:r>
+            <a:endParaRPr lang="zh-CN" altLang="en-US" sz="1600" b="1"/>
+          </a:p>
+        </p:txBody>
+      </p:sp>
+      <p:sp>
+        <p:nvSpPr>
+          <p:cNvPr id="6" name="下箭头 5"/>
+          <p:cNvSpPr/>
+          <p:nvPr/>
+        </p:nvSpPr>
+        <p:spPr>
+          <a:xfrm>
+            <a:off x="3402330" y="1264920"/>
+            <a:ext cx="396875" cy="396875"/>
+          </a:xfrm>
+          <a:prstGeom prst="downArrow">
+            <a:avLst/>
+          </a:prstGeom>
+          <a:gradFill>
+            <a:gsLst>
+              <a:gs pos="50000">
+                <a:schemeClr val="accent1"/>
+              </a:gs>
+              <a:gs pos="0">
+                <a:schemeClr val="accent1">
+                  <a:lumMod val="25000"/>
+                  <a:lumOff val="75000"/>
+                </a:schemeClr>
+              </a:gs>
+              <a:gs pos="100000">
+                <a:schemeClr val="accent1">
+                  <a:lumMod val="85000"/>
+                </a:schemeClr>
+              </a:gs>
+            </a:gsLst>
+            <a:lin ang="5400000" scaled="1"/>
+          </a:gradFill>
+        </p:spPr>
+        <p:style>
+          <a:lnRef idx="2">
+            <a:schemeClr val="accent1">
+              <a:lumMod val="75000"/>
+            </a:schemeClr>
+          </a:lnRef>
+          <a:fillRef idx="1">
+            <a:schemeClr val="accent1"/>
+          </a:fillRef>
+          <a:effectRef idx="0">
+            <a:srgbClr val="FFFFFF"/>
+          </a:effectRef>
+          <a:fontRef idx="minor">
+            <a:schemeClr val="lt1"/>
+          </a:fontRef>
+        </p:style>
+        <p:txBody>
+          <a:bodyPr rtlCol="0" anchor="ctr"/>
+          <a:p>
+            <a:pPr algn="ctr"/>
+            <a:endParaRPr lang="zh-CN" altLang="en-US"/>
+          </a:p>
+        </p:txBody>
+      </p:sp>
+      <p:sp>
+        <p:nvSpPr>
+          <p:cNvPr id="7" name="文本框 6"/>
+          <p:cNvSpPr txBox="1"/>
+          <p:nvPr/>
+        </p:nvSpPr>
+        <p:spPr>
+          <a:xfrm>
+            <a:off x="1362075" y="1506220"/>
+            <a:ext cx="1078230" cy="337185"/>
+          </a:xfrm>
+          <a:prstGeom prst="rect">
+            <a:avLst/>
+          </a:prstGeom>
+        </p:spPr>
+        <p:txBody>
+          <a:bodyPr wrap="square">
+            <a:spAutoFit/>
+          </a:bodyPr>
+          <a:p>
+            <a:r>
+              <a:rPr lang="zh-CN" altLang="en-US" sz="1600" b="1"/>
+              <a:t>研究</a:t>
+            </a:r>
+            <a:r>
+              <a:rPr lang="zh-CN" altLang="en-US" sz="1600" b="1"/>
+              <a:t>场景</a:t>
+            </a:r>
+            <a:endParaRPr lang="zh-CN" altLang="en-US" sz="1600" b="1"/>
+          </a:p>
+        </p:txBody>
+      </p:sp>
+      <p:sp>
+        <p:nvSpPr>
+          <p:cNvPr id="8" name="文本框 7"/>
+          <p:cNvSpPr txBox="1"/>
+          <p:nvPr/>
+        </p:nvSpPr>
+        <p:spPr>
+          <a:xfrm>
+            <a:off x="1362075" y="1843405"/>
+            <a:ext cx="1078230" cy="583565"/>
+          </a:xfrm>
+          <a:prstGeom prst="rect">
+            <a:avLst/>
+          </a:prstGeom>
+        </p:spPr>
+        <p:txBody>
+          <a:bodyPr wrap="square">
+            <a:spAutoFit/>
+          </a:bodyPr>
+          <a:p>
+            <a:pPr algn="ctr"/>
+            <a:r>
+              <a:rPr lang="zh-CN" altLang="en-US" sz="1600" b="1"/>
+              <a:t>（业务承载</a:t>
+            </a:r>
+            <a:r>
+              <a:rPr lang="zh-CN" altLang="en-US" sz="1600" b="1"/>
+              <a:t>环节）</a:t>
+            </a:r>
+            <a:endParaRPr lang="zh-CN" altLang="en-US" sz="1600" b="1"/>
+          </a:p>
+        </p:txBody>
+      </p:sp>
     </p:spTree>
   </p:cSld>
   <p:clrMapOvr>
@@ -3187,4 +3805,263 @@
     </a:ext>
   </a:extLst>
 </a:theme>
+</file>
+
+<file path=ppt/theme/theme2.xml><?xml version="1.0" encoding="utf-8"?>
+<a:theme xmlns:a="http://schemas.openxmlformats.org/drawingml/2006/main" name="Office 主题">
+  <a:themeElements>
+    <a:clrScheme name="Office">
+      <a:dk1>
+        <a:sysClr val="windowText" lastClr="000000"/>
+      </a:dk1>
+      <a:lt1>
+        <a:sysClr val="window" lastClr="FFFFFF"/>
+      </a:lt1>
+      <a:dk2>
+        <a:srgbClr val="44546A"/>
+      </a:dk2>
+      <a:lt2>
+        <a:srgbClr val="E7E6E6"/>
+      </a:lt2>
+      <a:accent1>
+        <a:srgbClr val="5B9BD5"/>
+      </a:accent1>
+      <a:accent2>
+        <a:srgbClr val="ED7D31"/>
+      </a:accent2>
+      <a:accent3>
+        <a:srgbClr val="A5A5A5"/>
+      </a:accent3>
+      <a:accent4>
+        <a:srgbClr val="FFC000"/>
+      </a:accent4>
+      <a:accent5>
+        <a:srgbClr val="4472C4"/>
+      </a:accent5>
+      <a:accent6>
+        <a:srgbClr val="70AD47"/>
+      </a:accent6>
+      <a:hlink>
+        <a:srgbClr val="0563C1"/>
+      </a:hlink>
+      <a:folHlink>
+        <a:srgbClr val="954F72"/>
+      </a:folHlink>
+    </a:clrScheme>
+    <a:fontScheme name="Office">
+      <a:majorFont>
+        <a:latin typeface="Calibri Light"/>
+        <a:ea typeface=""/>
+        <a:cs typeface=""/>
+        <a:font script="Jpan" typeface="ＭＳ Ｐゴシック"/>
+        <a:font script="Hang" typeface="맑은 고딕"/>
+        <a:font script="Hans" typeface="宋体"/>
+        <a:font script="Hant" typeface="新細明體"/>
+        <a:font script="Arab" typeface="Times New Roman"/>
+        <a:font script="Hebr" typeface="Times New Roman"/>
+        <a:font script="Thai" typeface="Angsana New"/>
+        <a:font script="Ethi" typeface="Nyala"/>
+        <a:font script="Beng" typeface="Vrinda"/>
+        <a:font script="Gujr" typeface="Shruti"/>
+        <a:font script="Khmr" typeface="MoolBoran"/>
+        <a:font script="Knda" typeface="Tunga"/>
+        <a:font script="Guru" typeface="Raavi"/>
+        <a:font script="Cans" typeface="Euphemia"/>
+        <a:font script="Cher" typeface="Plantagenet Cherokee"/>
+        <a:font script="Yiii" typeface="Microsoft Yi Baiti"/>
+        <a:font script="Tibt" typeface="Microsoft Himalaya"/>
+        <a:font script="Thaa" typeface="MV Boli"/>
+        <a:font script="Deva" typeface="Mangal"/>
+        <a:font script="Telu" typeface="Gautami"/>
+        <a:font script="Taml" typeface="Latha"/>
+        <a:font script="Syrc" typeface="Estrangelo Edessa"/>
+        <a:font script="Orya" typeface="Kalinga"/>
+        <a:font script="Mlym" typeface="Kartika"/>
+        <a:font script="Laoo" typeface="DokChampa"/>
+        <a:font script="Sinh" typeface="Iskoola Pota"/>
+        <a:font script="Mong" typeface="Mongolian Baiti"/>
+        <a:font script="Viet" typeface="Times New Roman"/>
+        <a:font script="Uigh" typeface="Microsoft Uighur"/>
+        <a:font script="Geor" typeface="Sylfaen"/>
+      </a:majorFont>
+      <a:minorFont>
+        <a:latin typeface="Calibri"/>
+        <a:ea typeface=""/>
+        <a:cs typeface=""/>
+        <a:font script="Jpan" typeface="ＭＳ Ｐゴシック"/>
+        <a:font script="Hang" typeface="맑은 고딕"/>
+        <a:font script="Hans" typeface="宋体"/>
+        <a:font script="Hant" typeface="新細明體"/>
+        <a:font script="Arab" typeface="Arial"/>
+        <a:font script="Hebr" typeface="Arial"/>
+        <a:font script="Thai" typeface="Cordia New"/>
+        <a:font script="Ethi" typeface="Nyala"/>
+        <a:font script="Beng" typeface="Vrinda"/>
+        <a:font script="Gujr" typeface="Shruti"/>
+        <a:font script="Khmr" typeface="DaunPenh"/>
+        <a:font script="Knda" typeface="Tunga"/>
+        <a:font script="Guru" typeface="Raavi"/>
+        <a:font script="Cans" typeface="Euphemia"/>
+        <a:font script="Cher" typeface="Plantagenet Cherokee"/>
+        <a:font script="Yiii" typeface="Microsoft Yi Baiti"/>
+        <a:font script="Tibt" typeface="Microsoft Himalaya"/>
+        <a:font script="Thaa" typeface="MV Boli"/>
+        <a:font script="Deva" typeface="Mangal"/>
+        <a:font script="Telu" typeface="Gautami"/>
+        <a:font script="Taml" typeface="Latha"/>
+        <a:font script="Syrc" typeface="Estrangelo Edessa"/>
+        <a:font script="Orya" typeface="Kalinga"/>
+        <a:font script="Mlym" typeface="Kartika"/>
+        <a:font script="Laoo" typeface="DokChampa"/>
+        <a:font script="Sinh" typeface="Iskoola Pota"/>
+        <a:font script="Mong" typeface="Mongolian Baiti"/>
+        <a:font script="Viet" typeface="Arial"/>
+        <a:font script="Uigh" typeface="Microsoft Uighur"/>
+        <a:font script="Geor" typeface="Sylfaen"/>
+      </a:minorFont>
+    </a:fontScheme>
+    <a:fmtScheme name="Office">
+      <a:fillStyleLst>
+        <a:solidFill>
+          <a:schemeClr val="phClr"/>
+        </a:solidFill>
+        <a:gradFill rotWithShape="1">
+          <a:gsLst>
+            <a:gs pos="0">
+              <a:schemeClr val="phClr">
+                <a:lumMod val="110000"/>
+                <a:satMod val="105000"/>
+                <a:tint val="67000"/>
+              </a:schemeClr>
+            </a:gs>
+            <a:gs pos="50000">
+              <a:schemeClr val="phClr">
+                <a:lumMod val="105000"/>
+                <a:satMod val="103000"/>
+                <a:tint val="73000"/>
+              </a:schemeClr>
+            </a:gs>
+            <a:gs pos="100000">
+              <a:schemeClr val="phClr">
+                <a:lumMod val="105000"/>
+                <a:satMod val="109000"/>
+                <a:tint val="81000"/>
+              </a:schemeClr>
+            </a:gs>
+          </a:gsLst>
+          <a:lin ang="5400000" scaled="0"/>
+        </a:gradFill>
+        <a:gradFill rotWithShape="1">
+          <a:gsLst>
+            <a:gs pos="0">
+              <a:schemeClr val="phClr">
+                <a:satMod val="103000"/>
+                <a:lumMod val="102000"/>
+                <a:tint val="94000"/>
+              </a:schemeClr>
+            </a:gs>
+            <a:gs pos="50000">
+              <a:schemeClr val="phClr">
+                <a:satMod val="110000"/>
+                <a:lumMod val="100000"/>
+                <a:shade val="100000"/>
+              </a:schemeClr>
+            </a:gs>
+            <a:gs pos="100000">
+              <a:schemeClr val="phClr">
+                <a:lumMod val="99000"/>
+                <a:satMod val="120000"/>
+                <a:shade val="78000"/>
+              </a:schemeClr>
+            </a:gs>
+          </a:gsLst>
+          <a:lin ang="5400000" scaled="0"/>
+        </a:gradFill>
+      </a:fillStyleLst>
+      <a:lnStyleLst>
+        <a:ln w="6350" cap="flat" cmpd="sng" algn="ctr">
+          <a:solidFill>
+            <a:schemeClr val="phClr"/>
+          </a:solidFill>
+          <a:prstDash val="solid"/>
+          <a:miter lim="800000"/>
+        </a:ln>
+        <a:ln w="12700" cap="flat" cmpd="sng" algn="ctr">
+          <a:solidFill>
+            <a:schemeClr val="phClr"/>
+          </a:solidFill>
+          <a:prstDash val="solid"/>
+          <a:miter lim="800000"/>
+        </a:ln>
+        <a:ln w="19050" cap="flat" cmpd="sng" algn="ctr">
+          <a:solidFill>
+            <a:schemeClr val="phClr"/>
+          </a:solidFill>
+          <a:prstDash val="solid"/>
+          <a:miter lim="800000"/>
+        </a:ln>
+      </a:lnStyleLst>
+      <a:effectStyleLst>
+        <a:effectStyle>
+          <a:effectLst/>
+        </a:effectStyle>
+        <a:effectStyle>
+          <a:effectLst/>
+        </a:effectStyle>
+        <a:effectStyle>
+          <a:effectLst>
+            <a:outerShdw blurRad="57150" dist="19050" dir="5400000" algn="ctr" rotWithShape="0">
+              <a:srgbClr val="000000">
+                <a:alpha val="63000"/>
+              </a:srgbClr>
+            </a:outerShdw>
+          </a:effectLst>
+        </a:effectStyle>
+      </a:effectStyleLst>
+      <a:bgFillStyleLst>
+        <a:solidFill>
+          <a:schemeClr val="phClr"/>
+        </a:solidFill>
+        <a:solidFill>
+          <a:schemeClr val="phClr">
+            <a:tint val="95000"/>
+            <a:satMod val="170000"/>
+          </a:schemeClr>
+        </a:solidFill>
+        <a:gradFill rotWithShape="1">
+          <a:gsLst>
+            <a:gs pos="0">
+              <a:schemeClr val="phClr">
+                <a:tint val="93000"/>
+                <a:satMod val="150000"/>
+                <a:shade val="98000"/>
+                <a:lumMod val="102000"/>
+              </a:schemeClr>
+            </a:gs>
+            <a:gs pos="50000">
+              <a:schemeClr val="phClr">
+                <a:tint val="98000"/>
+                <a:satMod val="130000"/>
+                <a:shade val="90000"/>
+                <a:lumMod val="103000"/>
+              </a:schemeClr>
+            </a:gs>
+            <a:gs pos="100000">
+              <a:schemeClr val="phClr">
+                <a:shade val="63000"/>
+                <a:satMod val="120000"/>
+              </a:schemeClr>
+            </a:gs>
+          </a:gsLst>
+          <a:lin ang="5400000" scaled="0"/>
+        </a:gradFill>
+      </a:bgFillStyleLst>
+    </a:fmtScheme>
+  </a:themeElements>
+  <a:extLst>
+    <a:ext uri="{05A4C25C-085E-4340-85A3-A5531E510DB2}">
+      <thm15:themeFamily xmlns:thm15="http://schemas.microsoft.com/office/thememl/2012/main" name="Office Theme" id="{62F939B6-93AF-4DB8-9C6B-D6C7DFDC589F}" vid="{4A3C46E8-61CC-4603-A589-7422A47A8E4A}"/>
+    </a:ext>
+  </a:extLst>
+</a:theme>
 </file>
--- a/figures/ppt/研究体系.pptx
+++ b/figures/ppt/研究体系.pptx
@@ -3336,7 +3336,7 @@
         </p:nvSpPr>
         <p:spPr>
           <a:xfrm>
-            <a:off x="2789555" y="702945"/>
+            <a:off x="2789555" y="842645"/>
             <a:ext cx="5760720" cy="454025"/>
           </a:xfrm>
           <a:prstGeom prst="rect">
@@ -3381,7 +3381,7 @@
         </p:nvSpPr>
         <p:spPr>
           <a:xfrm>
-            <a:off x="3237865" y="744855"/>
+            <a:off x="3237865" y="884555"/>
             <a:ext cx="4863465" cy="337185"/>
           </a:xfrm>
           <a:prstGeom prst="rect">
@@ -3427,13 +3427,1397 @@
       </p:sp>
       <p:sp>
         <p:nvSpPr>
+          <p:cNvPr id="7" name="文本框 6"/>
+          <p:cNvSpPr txBox="1"/>
+          <p:nvPr/>
+        </p:nvSpPr>
+        <p:spPr>
+          <a:xfrm>
+            <a:off x="475615" y="1814195"/>
+            <a:ext cx="1863725" cy="583565"/>
+          </a:xfrm>
+          <a:prstGeom prst="rect">
+            <a:avLst/>
+          </a:prstGeom>
+        </p:spPr>
+        <p:txBody>
+          <a:bodyPr wrap="square">
+            <a:spAutoFit/>
+          </a:bodyPr>
+          <a:p>
+            <a:pPr algn="ctr"/>
+            <a:r>
+              <a:rPr lang="zh-CN" altLang="en-US" sz="1600" b="1"/>
+              <a:t>研究</a:t>
+            </a:r>
+            <a:r>
+              <a:rPr lang="zh-CN" altLang="en-US" sz="1600" b="1"/>
+              <a:t>场景</a:t>
+            </a:r>
+            <a:endParaRPr lang="zh-CN" altLang="en-US" sz="1600" b="1"/>
+          </a:p>
+          <a:p>
+            <a:pPr algn="ctr"/>
+            <a:r>
+              <a:rPr lang="zh-CN" altLang="en-US" sz="1600" b="1"/>
+              <a:t>（端到端业务</a:t>
+            </a:r>
+            <a:r>
+              <a:rPr lang="zh-CN" altLang="en-US" sz="1600" b="1"/>
+              <a:t>承载）</a:t>
+            </a:r>
+            <a:endParaRPr lang="zh-CN" altLang="en-US" sz="1600" b="1"/>
+          </a:p>
+        </p:txBody>
+      </p:sp>
+      <p:sp>
+        <p:nvSpPr>
+          <p:cNvPr id="9" name="矩形 8"/>
+          <p:cNvSpPr/>
+          <p:nvPr/>
+        </p:nvSpPr>
+        <p:spPr>
+          <a:xfrm>
+            <a:off x="2789555" y="1769745"/>
+            <a:ext cx="5760720" cy="691515"/>
+          </a:xfrm>
+          <a:prstGeom prst="rect">
+            <a:avLst/>
+          </a:prstGeom>
+          <a:noFill/>
+          <a:ln>
+            <a:solidFill>
+              <a:schemeClr val="tx1"/>
+            </a:solidFill>
+          </a:ln>
+        </p:spPr>
+        <p:style>
+          <a:lnRef idx="2">
+            <a:schemeClr val="accent1">
+              <a:lumMod val="75000"/>
+            </a:schemeClr>
+          </a:lnRef>
+          <a:fillRef idx="1">
+            <a:schemeClr val="accent1"/>
+          </a:fillRef>
+          <a:effectRef idx="0">
+            <a:srgbClr val="FFFFFF"/>
+          </a:effectRef>
+          <a:fontRef idx="minor">
+            <a:schemeClr val="lt1"/>
+          </a:fontRef>
+        </p:style>
+        <p:txBody>
+          <a:bodyPr rtlCol="0" anchor="ctr"/>
+          <a:p>
+            <a:pPr algn="ctr"/>
+            <a:endParaRPr lang="zh-CN" altLang="en-US"/>
+          </a:p>
+        </p:txBody>
+      </p:sp>
+      <p:sp>
+        <p:nvSpPr>
+          <p:cNvPr id="10" name="文本框 9"/>
+          <p:cNvSpPr txBox="1"/>
+          <p:nvPr/>
+        </p:nvSpPr>
+        <p:spPr>
+          <a:xfrm>
+            <a:off x="3430270" y="1769745"/>
+            <a:ext cx="4863465" cy="337185"/>
+          </a:xfrm>
+          <a:prstGeom prst="rect">
+            <a:avLst/>
+          </a:prstGeom>
+        </p:spPr>
+        <p:txBody>
+          <a:bodyPr wrap="square">
+            <a:spAutoFit/>
+          </a:bodyPr>
+          <a:p>
+            <a:r>
+              <a:rPr lang="zh-CN" altLang="en-US" sz="1600"/>
+              <a:t>单层</a:t>
+            </a:r>
+            <a:r>
+              <a:rPr lang="en-US" altLang="zh-CN" sz="1600"/>
+              <a:t>LEO</a:t>
+            </a:r>
+            <a:r>
+              <a:rPr lang="zh-CN" altLang="en-US" sz="1600"/>
+              <a:t>星座</a:t>
+            </a:r>
+            <a:r>
+              <a:rPr lang="zh-CN" altLang="en-US" sz="1600"/>
+              <a:t>下，海量用户对地发起异构业务传输</a:t>
+            </a:r>
+            <a:endParaRPr lang="zh-CN" altLang="en-US" sz="1600"/>
+          </a:p>
+        </p:txBody>
+      </p:sp>
+      <p:sp>
+        <p:nvSpPr>
+          <p:cNvPr id="11" name="文本框 10"/>
+          <p:cNvSpPr txBox="1"/>
+          <p:nvPr/>
+        </p:nvSpPr>
+        <p:spPr>
+          <a:xfrm>
+            <a:off x="3237865" y="2089785"/>
+            <a:ext cx="4863465" cy="337185"/>
+          </a:xfrm>
+          <a:prstGeom prst="rect">
+            <a:avLst/>
+          </a:prstGeom>
+        </p:spPr>
+        <p:txBody>
+          <a:bodyPr wrap="square">
+            <a:spAutoFit/>
+          </a:bodyPr>
+          <a:p>
+            <a:r>
+              <a:rPr lang="zh-CN" altLang="en-US" sz="1600"/>
+              <a:t>（状态感知</a:t>
+            </a:r>
+            <a:r>
+              <a:rPr lang="en-US" altLang="zh-CN" sz="1600"/>
+              <a:t> </a:t>
+            </a:r>
+            <a:r>
+              <a:rPr lang="zh-CN" altLang="en-US" sz="1600">
+                <a:latin typeface="Arial" panose="020B0604020202020204" pitchFamily="34" charset="0"/>
+                <a:cs typeface="Arial" panose="020B0604020202020204" pitchFamily="34" charset="0"/>
+              </a:rPr>
+              <a:t>→</a:t>
+            </a:r>
+            <a:r>
+              <a:rPr lang="en-US" altLang="zh-CN" sz="1600">
+                <a:latin typeface="Arial" panose="020B0604020202020204" pitchFamily="34" charset="0"/>
+                <a:cs typeface="Arial" panose="020B0604020202020204" pitchFamily="34" charset="0"/>
+              </a:rPr>
+              <a:t> </a:t>
+            </a:r>
+            <a:r>
+              <a:rPr lang="zh-CN" altLang="en-US" sz="1600">
+                <a:latin typeface="Arial" panose="020B0604020202020204" pitchFamily="34" charset="0"/>
+                <a:cs typeface="Arial" panose="020B0604020202020204" pitchFamily="34" charset="0"/>
+              </a:rPr>
+              <a:t>接入切换</a:t>
+            </a:r>
+            <a:r>
+              <a:rPr lang="en-US" altLang="zh-CN" sz="1600">
+                <a:latin typeface="Arial" panose="020B0604020202020204" pitchFamily="34" charset="0"/>
+                <a:cs typeface="Arial" panose="020B0604020202020204" pitchFamily="34" charset="0"/>
+              </a:rPr>
+              <a:t> → </a:t>
+            </a:r>
+            <a:r>
+              <a:rPr lang="zh-CN" altLang="en-US" sz="1600">
+                <a:latin typeface="Arial" panose="020B0604020202020204" pitchFamily="34" charset="0"/>
+                <a:cs typeface="Arial" panose="020B0604020202020204" pitchFamily="34" charset="0"/>
+              </a:rPr>
+              <a:t>资源调度</a:t>
+            </a:r>
+            <a:r>
+              <a:rPr lang="en-US" altLang="zh-CN" sz="1600">
+                <a:latin typeface="Arial" panose="020B0604020202020204" pitchFamily="34" charset="0"/>
+                <a:cs typeface="Arial" panose="020B0604020202020204" pitchFamily="34" charset="0"/>
+              </a:rPr>
+              <a:t> → </a:t>
+            </a:r>
+            <a:r>
+              <a:rPr lang="zh-CN" altLang="en-US" sz="1600">
+                <a:latin typeface="Arial" panose="020B0604020202020204" pitchFamily="34" charset="0"/>
+                <a:cs typeface="Arial" panose="020B0604020202020204" pitchFamily="34" charset="0"/>
+              </a:rPr>
+              <a:t>端到端</a:t>
+            </a:r>
+            <a:r>
+              <a:rPr lang="zh-CN" altLang="en-US" sz="1600">
+                <a:latin typeface="Arial" panose="020B0604020202020204" pitchFamily="34" charset="0"/>
+                <a:cs typeface="Arial" panose="020B0604020202020204" pitchFamily="34" charset="0"/>
+              </a:rPr>
+              <a:t>传输）</a:t>
+            </a:r>
+            <a:endParaRPr lang="zh-CN" altLang="en-US" sz="1600">
+              <a:latin typeface="Arial" panose="020B0604020202020204" pitchFamily="34" charset="0"/>
+              <a:cs typeface="Arial" panose="020B0604020202020204" pitchFamily="34" charset="0"/>
+            </a:endParaRPr>
+          </a:p>
+        </p:txBody>
+      </p:sp>
+      <p:sp>
+        <p:nvSpPr>
+          <p:cNvPr id="12" name="文本框 11"/>
+          <p:cNvSpPr txBox="1"/>
+          <p:nvPr/>
+        </p:nvSpPr>
+        <p:spPr>
+          <a:xfrm>
+            <a:off x="1059180" y="3355975"/>
+            <a:ext cx="1294130" cy="337185"/>
+          </a:xfrm>
+          <a:prstGeom prst="rect">
+            <a:avLst/>
+          </a:prstGeom>
+        </p:spPr>
+        <p:txBody>
+          <a:bodyPr wrap="square">
+            <a:spAutoFit/>
+          </a:bodyPr>
+          <a:p>
+            <a:r>
+              <a:rPr lang="zh-CN" altLang="en-US" sz="1600" b="1"/>
+              <a:t>问题与</a:t>
+            </a:r>
+            <a:r>
+              <a:rPr lang="zh-CN" altLang="en-US" sz="1600" b="1"/>
+              <a:t>挑战</a:t>
+            </a:r>
+            <a:endParaRPr lang="zh-CN" altLang="en-US" sz="1600" b="1"/>
+          </a:p>
+        </p:txBody>
+      </p:sp>
+      <p:sp>
+        <p:nvSpPr>
+          <p:cNvPr id="13" name="矩形 12"/>
+          <p:cNvSpPr/>
+          <p:nvPr/>
+        </p:nvSpPr>
+        <p:spPr>
+          <a:xfrm>
+            <a:off x="2461260" y="2988945"/>
+            <a:ext cx="1586230" cy="1065530"/>
+          </a:xfrm>
+          <a:prstGeom prst="rect">
+            <a:avLst/>
+          </a:prstGeom>
+          <a:noFill/>
+          <a:ln>
+            <a:solidFill>
+              <a:schemeClr val="tx1"/>
+            </a:solidFill>
+          </a:ln>
+        </p:spPr>
+        <p:style>
+          <a:lnRef idx="2">
+            <a:schemeClr val="accent1">
+              <a:lumMod val="75000"/>
+            </a:schemeClr>
+          </a:lnRef>
+          <a:fillRef idx="1">
+            <a:schemeClr val="accent1"/>
+          </a:fillRef>
+          <a:effectRef idx="0">
+            <a:srgbClr val="FFFFFF"/>
+          </a:effectRef>
+          <a:fontRef idx="minor">
+            <a:schemeClr val="lt1"/>
+          </a:fontRef>
+        </p:style>
+        <p:txBody>
+          <a:bodyPr rtlCol="0" anchor="ctr"/>
+          <a:p>
+            <a:pPr algn="ctr"/>
+            <a:endParaRPr lang="zh-CN" altLang="en-US"/>
+          </a:p>
+        </p:txBody>
+      </p:sp>
+      <p:sp>
+        <p:nvSpPr>
+          <p:cNvPr id="16" name="文本框 15"/>
+          <p:cNvSpPr txBox="1"/>
+          <p:nvPr/>
+        </p:nvSpPr>
+        <p:spPr>
+          <a:xfrm>
+            <a:off x="2398395" y="2988945"/>
+            <a:ext cx="1734820" cy="1076325"/>
+          </a:xfrm>
+          <a:prstGeom prst="rect">
+            <a:avLst/>
+          </a:prstGeom>
+          <a:noFill/>
+        </p:spPr>
+        <p:txBody>
+          <a:bodyPr wrap="square" rtlCol="0">
+            <a:spAutoFit/>
+          </a:bodyPr>
+          <a:p>
+            <a:pPr algn="ctr"/>
+            <a:r>
+              <a:rPr lang="zh-CN" altLang="en-US" sz="1600"/>
+              <a:t>不可靠的控制面传输导致协作时对邻居</a:t>
+            </a:r>
+            <a:r>
+              <a:rPr lang="zh-CN" altLang="en-US" sz="1600"/>
+              <a:t>状态的错误估计</a:t>
+            </a:r>
+            <a:endParaRPr lang="zh-CN" altLang="en-US" sz="1600"/>
+          </a:p>
+        </p:txBody>
+      </p:sp>
+      <p:grpSp>
+        <p:nvGrpSpPr>
+          <p:cNvPr id="21" name="组合 20"/>
+          <p:cNvGrpSpPr/>
+          <p:nvPr/>
+        </p:nvGrpSpPr>
+        <p:grpSpPr>
+          <a:xfrm>
+            <a:off x="4046855" y="2988945"/>
+            <a:ext cx="1734820" cy="1065530"/>
+            <a:chOff x="8434" y="7576"/>
+            <a:chExt cx="2732" cy="1678"/>
+          </a:xfrm>
+        </p:grpSpPr>
+        <p:sp>
+          <p:nvSpPr>
+            <p:cNvPr id="19" name="文本框 18"/>
+            <p:cNvSpPr txBox="1"/>
+            <p:nvPr/>
+          </p:nvSpPr>
+          <p:spPr>
+            <a:xfrm>
+              <a:off x="8434" y="7689"/>
+              <a:ext cx="2732" cy="1307"/>
+            </a:xfrm>
+            <a:prstGeom prst="rect">
+              <a:avLst/>
+            </a:prstGeom>
+            <a:noFill/>
+          </p:spPr>
+          <p:txBody>
+            <a:bodyPr wrap="square" rtlCol="0">
+              <a:spAutoFit/>
+            </a:bodyPr>
+            <a:p>
+              <a:pPr algn="ctr"/>
+              <a:r>
+                <a:rPr lang="zh-CN" altLang="en-US" sz="1600"/>
+                <a:t>用户利己性导致卫星拥塞，切换频繁</a:t>
+              </a:r>
+              <a:r>
+                <a:rPr lang="zh-CN" altLang="en-US" sz="1600"/>
+                <a:t>碰撞</a:t>
+              </a:r>
+              <a:endParaRPr lang="zh-CN" altLang="en-US" sz="1600"/>
+            </a:p>
+          </p:txBody>
+        </p:sp>
+        <p:sp>
+          <p:nvSpPr>
+            <p:cNvPr id="20" name="矩形 19"/>
+            <p:cNvSpPr/>
+            <p:nvPr/>
+          </p:nvSpPr>
+          <p:spPr>
+            <a:xfrm>
+              <a:off x="8544" y="7576"/>
+              <a:ext cx="2498" cy="1678"/>
+            </a:xfrm>
+            <a:prstGeom prst="rect">
+              <a:avLst/>
+            </a:prstGeom>
+            <a:noFill/>
+            <a:ln>
+              <a:solidFill>
+                <a:schemeClr val="tx1"/>
+              </a:solidFill>
+            </a:ln>
+          </p:spPr>
+          <p:style>
+            <a:lnRef idx="2">
+              <a:schemeClr val="accent1">
+                <a:lumMod val="75000"/>
+              </a:schemeClr>
+            </a:lnRef>
+            <a:fillRef idx="1">
+              <a:schemeClr val="accent1"/>
+            </a:fillRef>
+            <a:effectRef idx="0">
+              <a:srgbClr val="FFFFFF"/>
+            </a:effectRef>
+            <a:fontRef idx="minor">
+              <a:schemeClr val="lt1"/>
+            </a:fontRef>
+          </p:style>
+          <p:txBody>
+            <a:bodyPr rtlCol="0" anchor="ctr"/>
+            <a:p>
+              <a:pPr algn="ctr"/>
+              <a:endParaRPr lang="zh-CN" altLang="en-US"/>
+            </a:p>
+          </p:txBody>
+        </p:sp>
+      </p:grpSp>
+      <p:grpSp>
+        <p:nvGrpSpPr>
+          <p:cNvPr id="22" name="组合 21"/>
+          <p:cNvGrpSpPr/>
+          <p:nvPr/>
+        </p:nvGrpSpPr>
+        <p:grpSpPr>
+          <a:xfrm>
+            <a:off x="5774055" y="2988945"/>
+            <a:ext cx="1734820" cy="1065530"/>
+            <a:chOff x="8456" y="7576"/>
+            <a:chExt cx="2732" cy="1678"/>
+          </a:xfrm>
+        </p:grpSpPr>
+        <p:sp>
+          <p:nvSpPr>
+            <p:cNvPr id="23" name="文本框 22"/>
+            <p:cNvSpPr txBox="1"/>
+            <p:nvPr/>
+          </p:nvSpPr>
+          <p:spPr>
+            <a:xfrm>
+              <a:off x="8456" y="7689"/>
+              <a:ext cx="2732" cy="1307"/>
+            </a:xfrm>
+            <a:prstGeom prst="rect">
+              <a:avLst/>
+            </a:prstGeom>
+            <a:noFill/>
+          </p:spPr>
+          <p:txBody>
+            <a:bodyPr wrap="square" rtlCol="0">
+              <a:spAutoFit/>
+            </a:bodyPr>
+            <a:p>
+              <a:pPr algn="ctr"/>
+              <a:r>
+                <a:rPr lang="zh-CN" altLang="en-US" sz="1600"/>
+                <a:t>切片</a:t>
+              </a:r>
+              <a:r>
+                <a:rPr lang="en-US" altLang="zh-CN" sz="1600"/>
+                <a:t>-MAC</a:t>
+              </a:r>
+              <a:r>
+                <a:rPr lang="zh-CN" altLang="en-US" sz="1600"/>
+                <a:t>的不</a:t>
+              </a:r>
+              <a:r>
+                <a:rPr lang="zh-CN" altLang="en-US" sz="1600"/>
+                <a:t>匹配难以保障卫星用户的长期</a:t>
+              </a:r>
+              <a:r>
+                <a:rPr lang="en-US" altLang="zh-CN" sz="1600"/>
+                <a:t>Q</a:t>
+              </a:r>
+              <a:r>
+                <a:rPr lang="en-US" altLang="zh-CN" sz="1600"/>
+                <a:t>oS</a:t>
+              </a:r>
+              <a:endParaRPr lang="en-US" altLang="zh-CN" sz="1600"/>
+            </a:p>
+          </p:txBody>
+        </p:sp>
+        <p:sp>
+          <p:nvSpPr>
+            <p:cNvPr id="24" name="矩形 23"/>
+            <p:cNvSpPr/>
+            <p:nvPr/>
+          </p:nvSpPr>
+          <p:spPr>
+            <a:xfrm>
+              <a:off x="8544" y="7576"/>
+              <a:ext cx="2498" cy="1678"/>
+            </a:xfrm>
+            <a:prstGeom prst="rect">
+              <a:avLst/>
+            </a:prstGeom>
+            <a:noFill/>
+            <a:ln>
+              <a:solidFill>
+                <a:schemeClr val="tx1"/>
+              </a:solidFill>
+            </a:ln>
+          </p:spPr>
+          <p:style>
+            <a:lnRef idx="2">
+              <a:schemeClr val="accent1">
+                <a:lumMod val="75000"/>
+              </a:schemeClr>
+            </a:lnRef>
+            <a:fillRef idx="1">
+              <a:schemeClr val="accent1"/>
+            </a:fillRef>
+            <a:effectRef idx="0">
+              <a:srgbClr val="FFFFFF"/>
+            </a:effectRef>
+            <a:fontRef idx="minor">
+              <a:schemeClr val="lt1"/>
+            </a:fontRef>
+          </p:style>
+          <p:txBody>
+            <a:bodyPr rtlCol="0" anchor="ctr"/>
+            <a:p>
+              <a:pPr algn="ctr"/>
+              <a:endParaRPr lang="zh-CN" altLang="en-US"/>
+            </a:p>
+          </p:txBody>
+        </p:sp>
+      </p:grpSp>
+      <p:grpSp>
+        <p:nvGrpSpPr>
+          <p:cNvPr id="25" name="组合 24"/>
+          <p:cNvGrpSpPr/>
+          <p:nvPr/>
+        </p:nvGrpSpPr>
+        <p:grpSpPr>
+          <a:xfrm>
+            <a:off x="7494270" y="2988945"/>
+            <a:ext cx="1734820" cy="1148080"/>
+            <a:chOff x="8467" y="7576"/>
+            <a:chExt cx="2732" cy="1808"/>
+          </a:xfrm>
+        </p:grpSpPr>
+        <p:sp>
+          <p:nvSpPr>
+            <p:cNvPr id="26" name="文本框 25"/>
+            <p:cNvSpPr txBox="1"/>
+            <p:nvPr/>
+          </p:nvSpPr>
+          <p:spPr>
+            <a:xfrm>
+              <a:off x="8467" y="7689"/>
+              <a:ext cx="2732" cy="1695"/>
+            </a:xfrm>
+            <a:prstGeom prst="rect">
+              <a:avLst/>
+            </a:prstGeom>
+            <a:noFill/>
+          </p:spPr>
+          <p:txBody>
+            <a:bodyPr wrap="square" rtlCol="0">
+              <a:spAutoFit/>
+            </a:bodyPr>
+            <a:p>
+              <a:pPr algn="ctr"/>
+              <a:r>
+                <a:rPr lang="zh-CN" altLang="en-US" sz="1600"/>
+                <a:t>星上硬件与时延约束使传统语义编码与恢复不</a:t>
+              </a:r>
+              <a:r>
+                <a:rPr lang="zh-CN" altLang="en-US" sz="1600"/>
+                <a:t>可用</a:t>
+              </a:r>
+              <a:endParaRPr lang="zh-CN" altLang="en-US" sz="1600"/>
+            </a:p>
+          </p:txBody>
+        </p:sp>
+        <p:sp>
+          <p:nvSpPr>
+            <p:cNvPr id="27" name="矩形 26"/>
+            <p:cNvSpPr/>
+            <p:nvPr/>
+          </p:nvSpPr>
+          <p:spPr>
+            <a:xfrm>
+              <a:off x="8544" y="7576"/>
+              <a:ext cx="2498" cy="1678"/>
+            </a:xfrm>
+            <a:prstGeom prst="rect">
+              <a:avLst/>
+            </a:prstGeom>
+            <a:noFill/>
+            <a:ln>
+              <a:solidFill>
+                <a:schemeClr val="tx1"/>
+              </a:solidFill>
+            </a:ln>
+          </p:spPr>
+          <p:style>
+            <a:lnRef idx="2">
+              <a:schemeClr val="accent1">
+                <a:lumMod val="75000"/>
+              </a:schemeClr>
+            </a:lnRef>
+            <a:fillRef idx="1">
+              <a:schemeClr val="accent1"/>
+            </a:fillRef>
+            <a:effectRef idx="0">
+              <a:srgbClr val="FFFFFF"/>
+            </a:effectRef>
+            <a:fontRef idx="minor">
+              <a:schemeClr val="lt1"/>
+            </a:fontRef>
+          </p:style>
+          <p:txBody>
+            <a:bodyPr rtlCol="0" anchor="ctr"/>
+            <a:p>
+              <a:pPr algn="ctr"/>
+              <a:endParaRPr lang="zh-CN" altLang="en-US"/>
+            </a:p>
+          </p:txBody>
+        </p:sp>
+      </p:grpSp>
+      <p:sp>
+        <p:nvSpPr>
+          <p:cNvPr id="33" name="文本框 32"/>
+          <p:cNvSpPr txBox="1"/>
+          <p:nvPr/>
+        </p:nvSpPr>
+        <p:spPr>
+          <a:xfrm>
+            <a:off x="1241425" y="4688840"/>
+            <a:ext cx="1042035" cy="337185"/>
+          </a:xfrm>
+          <a:prstGeom prst="rect">
+            <a:avLst/>
+          </a:prstGeom>
+        </p:spPr>
+        <p:txBody>
+          <a:bodyPr wrap="square">
+            <a:spAutoFit/>
+          </a:bodyPr>
+          <a:p>
+            <a:r>
+              <a:rPr lang="zh-CN" altLang="en-US" sz="1600" b="1"/>
+              <a:t>研究</a:t>
+            </a:r>
+            <a:r>
+              <a:rPr lang="zh-CN" altLang="en-US" sz="1600" b="1"/>
+              <a:t>内容</a:t>
+            </a:r>
+            <a:endParaRPr lang="zh-CN" altLang="en-US" sz="1600" b="1"/>
+          </a:p>
+        </p:txBody>
+      </p:sp>
+      <p:grpSp>
+        <p:nvGrpSpPr>
+          <p:cNvPr id="35" name="组合 34"/>
+          <p:cNvGrpSpPr/>
+          <p:nvPr/>
+        </p:nvGrpSpPr>
+        <p:grpSpPr>
+          <a:xfrm>
+            <a:off x="2370455" y="4378325"/>
+            <a:ext cx="1734820" cy="1065530"/>
+            <a:chOff x="8401" y="7576"/>
+            <a:chExt cx="2732" cy="1678"/>
+          </a:xfrm>
+        </p:grpSpPr>
+        <p:sp>
+          <p:nvSpPr>
+            <p:cNvPr id="36" name="文本框 35"/>
+            <p:cNvSpPr txBox="1"/>
+            <p:nvPr/>
+          </p:nvSpPr>
+          <p:spPr>
+            <a:xfrm>
+              <a:off x="8401" y="7689"/>
+              <a:ext cx="2732" cy="1307"/>
+            </a:xfrm>
+            <a:prstGeom prst="rect">
+              <a:avLst/>
+            </a:prstGeom>
+            <a:noFill/>
+          </p:spPr>
+          <p:txBody>
+            <a:bodyPr wrap="square" rtlCol="0">
+              <a:spAutoFit/>
+            </a:bodyPr>
+            <a:p>
+              <a:pPr algn="ctr"/>
+              <a:r>
+                <a:rPr lang="zh-CN" altLang="en-US" sz="1600" b="1"/>
+                <a:t>多源置信度调控的分布式网络状态感知方法</a:t>
+              </a:r>
+              <a:endParaRPr lang="zh-CN" altLang="en-US" sz="1600" b="1"/>
+            </a:p>
+          </p:txBody>
+        </p:sp>
+        <p:sp>
+          <p:nvSpPr>
+            <p:cNvPr id="37" name="矩形 36"/>
+            <p:cNvSpPr/>
+            <p:nvPr/>
+          </p:nvSpPr>
+          <p:spPr>
+            <a:xfrm>
+              <a:off x="8544" y="7576"/>
+              <a:ext cx="2498" cy="1678"/>
+            </a:xfrm>
+            <a:prstGeom prst="rect">
+              <a:avLst/>
+            </a:prstGeom>
+            <a:noFill/>
+            <a:ln>
+              <a:solidFill>
+                <a:schemeClr val="tx1"/>
+              </a:solidFill>
+            </a:ln>
+          </p:spPr>
+          <p:style>
+            <a:lnRef idx="2">
+              <a:schemeClr val="accent1">
+                <a:lumMod val="75000"/>
+              </a:schemeClr>
+            </a:lnRef>
+            <a:fillRef idx="1">
+              <a:schemeClr val="accent1"/>
+            </a:fillRef>
+            <a:effectRef idx="0">
+              <a:srgbClr val="FFFFFF"/>
+            </a:effectRef>
+            <a:fontRef idx="minor">
+              <a:schemeClr val="lt1"/>
+            </a:fontRef>
+          </p:style>
+          <p:txBody>
+            <a:bodyPr rtlCol="0" anchor="ctr"/>
+            <a:p>
+              <a:pPr algn="ctr"/>
+              <a:endParaRPr lang="zh-CN" altLang="en-US"/>
+            </a:p>
+          </p:txBody>
+        </p:sp>
+      </p:grpSp>
+      <p:cxnSp>
+        <p:nvCxnSpPr>
+          <p:cNvPr id="38" name="直接箭头连接符 37"/>
+          <p:cNvCxnSpPr>
+            <a:endCxn id="16" idx="0"/>
+          </p:cNvCxnSpPr>
+          <p:nvPr/>
+        </p:nvCxnSpPr>
+        <p:spPr>
+          <a:xfrm flipH="1">
+            <a:off x="3265805" y="2468880"/>
+            <a:ext cx="0" cy="520065"/>
+          </a:xfrm>
+          <a:prstGeom prst="straightConnector1">
+            <a:avLst/>
+          </a:prstGeom>
+          <a:ln w="22225">
+            <a:tailEnd type="arrow"/>
+          </a:ln>
+        </p:spPr>
+        <p:style>
+          <a:lnRef idx="2">
+            <a:schemeClr val="accent1"/>
+          </a:lnRef>
+          <a:fillRef idx="0">
+            <a:srgbClr val="FFFFFF"/>
+          </a:fillRef>
+          <a:effectRef idx="0">
+            <a:srgbClr val="FFFFFF"/>
+          </a:effectRef>
+          <a:fontRef idx="minor">
+            <a:schemeClr val="tx1"/>
+          </a:fontRef>
+        </p:style>
+      </p:cxnSp>
+      <p:cxnSp>
+        <p:nvCxnSpPr>
+          <p:cNvPr id="39" name="直接箭头连接符 38"/>
+          <p:cNvCxnSpPr/>
+          <p:nvPr/>
+        </p:nvCxnSpPr>
+        <p:spPr>
+          <a:xfrm flipH="1">
+            <a:off x="4909820" y="2447925"/>
+            <a:ext cx="0" cy="520065"/>
+          </a:xfrm>
+          <a:prstGeom prst="straightConnector1">
+            <a:avLst/>
+          </a:prstGeom>
+          <a:ln w="22225">
+            <a:tailEnd type="arrow"/>
+          </a:ln>
+        </p:spPr>
+        <p:style>
+          <a:lnRef idx="2">
+            <a:schemeClr val="accent1"/>
+          </a:lnRef>
+          <a:fillRef idx="0">
+            <a:srgbClr val="FFFFFF"/>
+          </a:fillRef>
+          <a:effectRef idx="0">
+            <a:srgbClr val="FFFFFF"/>
+          </a:effectRef>
+          <a:fontRef idx="minor">
+            <a:schemeClr val="tx1"/>
+          </a:fontRef>
+        </p:style>
+      </p:cxnSp>
+      <p:cxnSp>
+        <p:nvCxnSpPr>
+          <p:cNvPr id="40" name="直接箭头连接符 39"/>
+          <p:cNvCxnSpPr/>
+          <p:nvPr/>
+        </p:nvCxnSpPr>
+        <p:spPr>
+          <a:xfrm flipH="1">
+            <a:off x="6623050" y="2465070"/>
+            <a:ext cx="0" cy="520065"/>
+          </a:xfrm>
+          <a:prstGeom prst="straightConnector1">
+            <a:avLst/>
+          </a:prstGeom>
+          <a:ln w="22225">
+            <a:tailEnd type="arrow"/>
+          </a:ln>
+        </p:spPr>
+        <p:style>
+          <a:lnRef idx="2">
+            <a:schemeClr val="accent1"/>
+          </a:lnRef>
+          <a:fillRef idx="0">
+            <a:srgbClr val="FFFFFF"/>
+          </a:fillRef>
+          <a:effectRef idx="0">
+            <a:srgbClr val="FFFFFF"/>
+          </a:effectRef>
+          <a:fontRef idx="minor">
+            <a:schemeClr val="tx1"/>
+          </a:fontRef>
+        </p:style>
+      </p:cxnSp>
+      <p:cxnSp>
+        <p:nvCxnSpPr>
+          <p:cNvPr id="41" name="直接箭头连接符 40"/>
+          <p:cNvCxnSpPr/>
+          <p:nvPr/>
+        </p:nvCxnSpPr>
+        <p:spPr>
+          <a:xfrm flipH="1">
+            <a:off x="8336280" y="2447925"/>
+            <a:ext cx="0" cy="520065"/>
+          </a:xfrm>
+          <a:prstGeom prst="straightConnector1">
+            <a:avLst/>
+          </a:prstGeom>
+          <a:ln w="22225">
+            <a:tailEnd type="arrow"/>
+          </a:ln>
+        </p:spPr>
+        <p:style>
+          <a:lnRef idx="2">
+            <a:schemeClr val="accent1"/>
+          </a:lnRef>
+          <a:fillRef idx="0">
+            <a:srgbClr val="FFFFFF"/>
+          </a:fillRef>
+          <a:effectRef idx="0">
+            <a:srgbClr val="FFFFFF"/>
+          </a:effectRef>
+          <a:fontRef idx="minor">
+            <a:schemeClr val="tx1"/>
+          </a:fontRef>
+        </p:style>
+      </p:cxnSp>
+      <p:cxnSp>
+        <p:nvCxnSpPr>
+          <p:cNvPr id="42" name="直接箭头连接符 41"/>
+          <p:cNvCxnSpPr/>
+          <p:nvPr/>
+        </p:nvCxnSpPr>
+        <p:spPr>
+          <a:xfrm flipH="1">
+            <a:off x="3328670" y="4066540"/>
+            <a:ext cx="0" cy="320675"/>
+          </a:xfrm>
+          <a:prstGeom prst="straightConnector1">
+            <a:avLst/>
+          </a:prstGeom>
+          <a:ln w="22225">
+            <a:tailEnd type="arrow"/>
+          </a:ln>
+        </p:spPr>
+        <p:style>
+          <a:lnRef idx="2">
+            <a:schemeClr val="accent1"/>
+          </a:lnRef>
+          <a:fillRef idx="0">
+            <a:srgbClr val="FFFFFF"/>
+          </a:fillRef>
+          <a:effectRef idx="0">
+            <a:srgbClr val="FFFFFF"/>
+          </a:effectRef>
+          <a:fontRef idx="minor">
+            <a:schemeClr val="tx1"/>
+          </a:fontRef>
+        </p:style>
+      </p:cxnSp>
+      <p:grpSp>
+        <p:nvGrpSpPr>
+          <p:cNvPr id="43" name="组合 42"/>
+          <p:cNvGrpSpPr/>
+          <p:nvPr/>
+        </p:nvGrpSpPr>
+        <p:grpSpPr>
+          <a:xfrm>
+            <a:off x="4042410" y="4387215"/>
+            <a:ext cx="1734820" cy="1065530"/>
+            <a:chOff x="8401" y="7576"/>
+            <a:chExt cx="2732" cy="1678"/>
+          </a:xfrm>
+        </p:grpSpPr>
+        <p:sp>
+          <p:nvSpPr>
+            <p:cNvPr id="44" name="文本框 43"/>
+            <p:cNvSpPr txBox="1"/>
+            <p:nvPr/>
+          </p:nvSpPr>
+          <p:spPr>
+            <a:xfrm>
+              <a:off x="8401" y="7689"/>
+              <a:ext cx="2732" cy="1307"/>
+            </a:xfrm>
+            <a:prstGeom prst="rect">
+              <a:avLst/>
+            </a:prstGeom>
+            <a:noFill/>
+          </p:spPr>
+          <p:txBody>
+            <a:bodyPr wrap="square" rtlCol="0">
+              <a:spAutoFit/>
+            </a:bodyPr>
+            <a:p>
+              <a:pPr algn="ctr"/>
+              <a:r>
+                <a:rPr lang="zh-CN" altLang="en-US" sz="1600" b="1"/>
+                <a:t>基于局部公平性估计的分布式协作接入切换机制</a:t>
+              </a:r>
+              <a:endParaRPr lang="zh-CN" altLang="en-US" sz="1600" b="1"/>
+            </a:p>
+          </p:txBody>
+        </p:sp>
+        <p:sp>
+          <p:nvSpPr>
+            <p:cNvPr id="45" name="矩形 44"/>
+            <p:cNvSpPr/>
+            <p:nvPr/>
+          </p:nvSpPr>
+          <p:spPr>
+            <a:xfrm>
+              <a:off x="8544" y="7576"/>
+              <a:ext cx="2498" cy="1678"/>
+            </a:xfrm>
+            <a:prstGeom prst="rect">
+              <a:avLst/>
+            </a:prstGeom>
+            <a:noFill/>
+            <a:ln>
+              <a:solidFill>
+                <a:schemeClr val="tx1"/>
+              </a:solidFill>
+            </a:ln>
+          </p:spPr>
+          <p:style>
+            <a:lnRef idx="2">
+              <a:schemeClr val="accent1">
+                <a:lumMod val="75000"/>
+              </a:schemeClr>
+            </a:lnRef>
+            <a:fillRef idx="1">
+              <a:schemeClr val="accent1"/>
+            </a:fillRef>
+            <a:effectRef idx="0">
+              <a:srgbClr val="FFFFFF"/>
+            </a:effectRef>
+            <a:fontRef idx="minor">
+              <a:schemeClr val="lt1"/>
+            </a:fontRef>
+          </p:style>
+          <p:txBody>
+            <a:bodyPr rtlCol="0" anchor="ctr"/>
+            <a:p>
+              <a:pPr algn="ctr"/>
+              <a:endParaRPr lang="zh-CN" altLang="en-US"/>
+            </a:p>
+          </p:txBody>
+        </p:sp>
+      </p:grpSp>
+      <p:grpSp>
+        <p:nvGrpSpPr>
+          <p:cNvPr id="46" name="组合 45"/>
+          <p:cNvGrpSpPr/>
+          <p:nvPr/>
+        </p:nvGrpSpPr>
+        <p:grpSpPr>
+          <a:xfrm>
+            <a:off x="5741670" y="4387215"/>
+            <a:ext cx="1734820" cy="1148080"/>
+            <a:chOff x="8401" y="7576"/>
+            <a:chExt cx="2732" cy="1808"/>
+          </a:xfrm>
+        </p:grpSpPr>
+        <p:sp>
+          <p:nvSpPr>
+            <p:cNvPr id="47" name="文本框 46"/>
+            <p:cNvSpPr txBox="1"/>
+            <p:nvPr/>
+          </p:nvSpPr>
+          <p:spPr>
+            <a:xfrm>
+              <a:off x="8401" y="7689"/>
+              <a:ext cx="2732" cy="1695"/>
+            </a:xfrm>
+            <a:prstGeom prst="rect">
+              <a:avLst/>
+            </a:prstGeom>
+            <a:noFill/>
+          </p:spPr>
+          <p:txBody>
+            <a:bodyPr wrap="square" rtlCol="0">
+              <a:spAutoFit/>
+            </a:bodyPr>
+            <a:p>
+              <a:pPr algn="ctr"/>
+              <a:r>
+                <a:rPr lang="zh-CN" altLang="en-US" sz="1600" b="1"/>
+                <a:t>基于生成式网络态势感知的切片--</a:t>
+              </a:r>
+              <a:r>
+                <a:rPr lang="en-US" altLang="zh-CN" sz="1600" b="1"/>
+                <a:t>MAC </a:t>
+              </a:r>
+              <a:r>
+                <a:rPr lang="zh-CN" altLang="en-US" sz="1600" b="1"/>
+                <a:t>分层协作</a:t>
+              </a:r>
+              <a:endParaRPr lang="zh-CN" altLang="en-US" sz="1600" b="1"/>
+            </a:p>
+            <a:p>
+              <a:pPr algn="ctr"/>
+              <a:r>
+                <a:rPr lang="zh-CN" altLang="en-US" sz="1600" b="1"/>
+                <a:t>优化</a:t>
+              </a:r>
+              <a:endParaRPr lang="zh-CN" altLang="en-US" sz="1600" b="1"/>
+            </a:p>
+          </p:txBody>
+        </p:sp>
+        <p:sp>
+          <p:nvSpPr>
+            <p:cNvPr id="48" name="矩形 47"/>
+            <p:cNvSpPr/>
+            <p:nvPr/>
+          </p:nvSpPr>
+          <p:spPr>
+            <a:xfrm>
+              <a:off x="8544" y="7576"/>
+              <a:ext cx="2498" cy="1678"/>
+            </a:xfrm>
+            <a:prstGeom prst="rect">
+              <a:avLst/>
+            </a:prstGeom>
+            <a:noFill/>
+            <a:ln>
+              <a:solidFill>
+                <a:schemeClr val="tx1"/>
+              </a:solidFill>
+            </a:ln>
+          </p:spPr>
+          <p:style>
+            <a:lnRef idx="2">
+              <a:schemeClr val="accent1">
+                <a:lumMod val="75000"/>
+              </a:schemeClr>
+            </a:lnRef>
+            <a:fillRef idx="1">
+              <a:schemeClr val="accent1"/>
+            </a:fillRef>
+            <a:effectRef idx="0">
+              <a:srgbClr val="FFFFFF"/>
+            </a:effectRef>
+            <a:fontRef idx="minor">
+              <a:schemeClr val="lt1"/>
+            </a:fontRef>
+          </p:style>
+          <p:txBody>
+            <a:bodyPr rtlCol="0" anchor="ctr"/>
+            <a:p>
+              <a:pPr algn="ctr"/>
+              <a:endParaRPr lang="zh-CN" altLang="en-US"/>
+            </a:p>
+          </p:txBody>
+        </p:sp>
+      </p:grpSp>
+      <p:cxnSp>
+        <p:nvCxnSpPr>
+          <p:cNvPr id="49" name="直接箭头连接符 48"/>
+          <p:cNvCxnSpPr/>
+          <p:nvPr/>
+        </p:nvCxnSpPr>
+        <p:spPr>
+          <a:xfrm flipH="1">
+            <a:off x="4909820" y="4054475"/>
+            <a:ext cx="0" cy="320675"/>
+          </a:xfrm>
+          <a:prstGeom prst="straightConnector1">
+            <a:avLst/>
+          </a:prstGeom>
+          <a:ln w="22225">
+            <a:tailEnd type="arrow"/>
+          </a:ln>
+        </p:spPr>
+        <p:style>
+          <a:lnRef idx="2">
+            <a:schemeClr val="accent1"/>
+          </a:lnRef>
+          <a:fillRef idx="0">
+            <a:srgbClr val="FFFFFF"/>
+          </a:fillRef>
+          <a:effectRef idx="0">
+            <a:srgbClr val="FFFFFF"/>
+          </a:effectRef>
+          <a:fontRef idx="minor">
+            <a:schemeClr val="tx1"/>
+          </a:fontRef>
+        </p:style>
+      </p:cxnSp>
+      <p:cxnSp>
+        <p:nvCxnSpPr>
+          <p:cNvPr id="50" name="直接箭头连接符 49"/>
+          <p:cNvCxnSpPr/>
+          <p:nvPr/>
+        </p:nvCxnSpPr>
+        <p:spPr>
+          <a:xfrm flipH="1">
+            <a:off x="6641465" y="4054475"/>
+            <a:ext cx="0" cy="320675"/>
+          </a:xfrm>
+          <a:prstGeom prst="straightConnector1">
+            <a:avLst/>
+          </a:prstGeom>
+          <a:ln w="22225">
+            <a:tailEnd type="arrow"/>
+          </a:ln>
+        </p:spPr>
+        <p:style>
+          <a:lnRef idx="2">
+            <a:schemeClr val="accent1"/>
+          </a:lnRef>
+          <a:fillRef idx="0">
+            <a:srgbClr val="FFFFFF"/>
+          </a:fillRef>
+          <a:effectRef idx="0">
+            <a:srgbClr val="FFFFFF"/>
+          </a:effectRef>
+          <a:fontRef idx="minor">
+            <a:schemeClr val="tx1"/>
+          </a:fontRef>
+        </p:style>
+      </p:cxnSp>
+      <p:grpSp>
+        <p:nvGrpSpPr>
+          <p:cNvPr id="51" name="组合 50"/>
+          <p:cNvGrpSpPr/>
+          <p:nvPr/>
+        </p:nvGrpSpPr>
+        <p:grpSpPr>
+          <a:xfrm>
+            <a:off x="7478395" y="4387215"/>
+            <a:ext cx="1734820" cy="1148080"/>
+            <a:chOff x="8401" y="7576"/>
+            <a:chExt cx="2732" cy="1808"/>
+          </a:xfrm>
+        </p:grpSpPr>
+        <p:sp>
+          <p:nvSpPr>
+            <p:cNvPr id="52" name="文本框 51"/>
+            <p:cNvSpPr txBox="1"/>
+            <p:nvPr/>
+          </p:nvSpPr>
+          <p:spPr>
+            <a:xfrm>
+              <a:off x="8401" y="7689"/>
+              <a:ext cx="2732" cy="1695"/>
+            </a:xfrm>
+            <a:prstGeom prst="rect">
+              <a:avLst/>
+            </a:prstGeom>
+            <a:noFill/>
+          </p:spPr>
+          <p:txBody>
+            <a:bodyPr wrap="square" rtlCol="0">
+              <a:spAutoFit/>
+            </a:bodyPr>
+            <a:p>
+              <a:pPr algn="ctr"/>
+              <a:r>
+                <a:rPr lang="zh-CN" altLang="en-US" sz="1600" b="1"/>
+                <a:t>基于任务反馈与协同增量重传的轻量化语义传输机制</a:t>
+              </a:r>
+              <a:endParaRPr lang="zh-CN" altLang="en-US" sz="1600" b="1"/>
+            </a:p>
+          </p:txBody>
+        </p:sp>
+        <p:sp>
+          <p:nvSpPr>
+            <p:cNvPr id="53" name="矩形 52"/>
+            <p:cNvSpPr/>
+            <p:nvPr/>
+          </p:nvSpPr>
+          <p:spPr>
+            <a:xfrm>
+              <a:off x="8544" y="7576"/>
+              <a:ext cx="2498" cy="1678"/>
+            </a:xfrm>
+            <a:prstGeom prst="rect">
+              <a:avLst/>
+            </a:prstGeom>
+            <a:noFill/>
+            <a:ln>
+              <a:solidFill>
+                <a:schemeClr val="tx1"/>
+              </a:solidFill>
+            </a:ln>
+          </p:spPr>
+          <p:style>
+            <a:lnRef idx="2">
+              <a:schemeClr val="accent1">
+                <a:lumMod val="75000"/>
+              </a:schemeClr>
+            </a:lnRef>
+            <a:fillRef idx="1">
+              <a:schemeClr val="accent1"/>
+            </a:fillRef>
+            <a:effectRef idx="0">
+              <a:srgbClr val="FFFFFF"/>
+            </a:effectRef>
+            <a:fontRef idx="minor">
+              <a:schemeClr val="lt1"/>
+            </a:fontRef>
+          </p:style>
+          <p:txBody>
+            <a:bodyPr rtlCol="0" anchor="ctr"/>
+            <a:p>
+              <a:pPr algn="ctr"/>
+              <a:endParaRPr lang="zh-CN" altLang="en-US"/>
+            </a:p>
+          </p:txBody>
+        </p:sp>
+      </p:grpSp>
+      <p:cxnSp>
+        <p:nvCxnSpPr>
+          <p:cNvPr id="54" name="直接箭头连接符 53"/>
+          <p:cNvCxnSpPr/>
+          <p:nvPr/>
+        </p:nvCxnSpPr>
+        <p:spPr>
+          <a:xfrm flipH="1">
+            <a:off x="8373110" y="4054475"/>
+            <a:ext cx="0" cy="320675"/>
+          </a:xfrm>
+          <a:prstGeom prst="straightConnector1">
+            <a:avLst/>
+          </a:prstGeom>
+          <a:ln w="22225">
+            <a:tailEnd type="arrow"/>
+          </a:ln>
+        </p:spPr>
+        <p:style>
+          <a:lnRef idx="2">
+            <a:schemeClr val="accent1"/>
+          </a:lnRef>
+          <a:fillRef idx="0">
+            <a:srgbClr val="FFFFFF"/>
+          </a:fillRef>
+          <a:effectRef idx="0">
+            <a:srgbClr val="FFFFFF"/>
+          </a:effectRef>
+          <a:fontRef idx="minor">
+            <a:schemeClr val="tx1"/>
+          </a:fontRef>
+        </p:style>
+      </p:cxnSp>
+      <p:sp>
+        <p:nvSpPr>
+          <p:cNvPr id="55" name="文本框 54"/>
+          <p:cNvSpPr txBox="1"/>
+          <p:nvPr/>
+        </p:nvSpPr>
+        <p:spPr>
+          <a:xfrm>
+            <a:off x="1205865" y="5955030"/>
+            <a:ext cx="1042035" cy="337185"/>
+          </a:xfrm>
+          <a:prstGeom prst="rect">
+            <a:avLst/>
+          </a:prstGeom>
+        </p:spPr>
+        <p:txBody>
+          <a:bodyPr wrap="square">
+            <a:spAutoFit/>
+          </a:bodyPr>
+          <a:p>
+            <a:r>
+              <a:rPr lang="zh-CN" altLang="en-US" sz="1600" b="1"/>
+              <a:t>研究</a:t>
+            </a:r>
+            <a:r>
+              <a:rPr lang="zh-CN" altLang="en-US" sz="1600" b="1"/>
+              <a:t>目标</a:t>
+            </a:r>
+            <a:endParaRPr lang="zh-CN" altLang="en-US" sz="1600" b="1"/>
+          </a:p>
+        </p:txBody>
+      </p:sp>
+      <p:sp>
+        <p:nvSpPr>
+          <p:cNvPr id="56" name="矩形 55"/>
+          <p:cNvSpPr/>
+          <p:nvPr/>
+        </p:nvSpPr>
+        <p:spPr>
+          <a:xfrm>
+            <a:off x="2338705" y="1647190"/>
+            <a:ext cx="6890385" cy="3965575"/>
+          </a:xfrm>
+          <a:prstGeom prst="rect">
+            <a:avLst/>
+          </a:prstGeom>
+          <a:noFill/>
+          <a:ln w="19050">
+            <a:solidFill>
+              <a:schemeClr val="bg1">
+                <a:lumMod val="65000"/>
+              </a:schemeClr>
+            </a:solidFill>
+            <a:prstDash val="sysDash"/>
+          </a:ln>
+        </p:spPr>
+        <p:style>
+          <a:lnRef idx="2">
+            <a:schemeClr val="accent1">
+              <a:lumMod val="75000"/>
+            </a:schemeClr>
+          </a:lnRef>
+          <a:fillRef idx="1">
+            <a:schemeClr val="accent1"/>
+          </a:fillRef>
+          <a:effectRef idx="0">
+            <a:srgbClr val="FFFFFF"/>
+          </a:effectRef>
+          <a:fontRef idx="minor">
+            <a:schemeClr val="lt1"/>
+          </a:fontRef>
+        </p:style>
+        <p:txBody>
+          <a:bodyPr rtlCol="0" anchor="ctr"/>
+          <a:p>
+            <a:pPr algn="ctr"/>
+            <a:endParaRPr lang="zh-CN" altLang="en-US"/>
+          </a:p>
+        </p:txBody>
+      </p:sp>
+      <p:sp>
+        <p:nvSpPr>
           <p:cNvPr id="6" name="下箭头 5"/>
           <p:cNvSpPr/>
           <p:nvPr/>
         </p:nvSpPr>
         <p:spPr>
           <a:xfrm>
-            <a:off x="3402330" y="1264920"/>
+            <a:off x="5377180" y="1334770"/>
             <a:ext cx="396875" cy="396875"/>
           </a:xfrm>
           <a:prstGeom prst="downArrow">
@@ -3485,14 +4869,291 @@
       </p:sp>
       <p:sp>
         <p:nvSpPr>
-          <p:cNvPr id="7" name="文本框 6"/>
+          <p:cNvPr id="57" name="下箭头 56"/>
+          <p:cNvSpPr/>
+          <p:nvPr/>
+        </p:nvSpPr>
+        <p:spPr>
+          <a:xfrm>
+            <a:off x="3129915" y="5535295"/>
+            <a:ext cx="396875" cy="396875"/>
+          </a:xfrm>
+          <a:prstGeom prst="downArrow">
+            <a:avLst/>
+          </a:prstGeom>
+          <a:gradFill>
+            <a:gsLst>
+              <a:gs pos="50000">
+                <a:schemeClr val="accent1"/>
+              </a:gs>
+              <a:gs pos="0">
+                <a:schemeClr val="accent1">
+                  <a:lumMod val="25000"/>
+                  <a:lumOff val="75000"/>
+                </a:schemeClr>
+              </a:gs>
+              <a:gs pos="100000">
+                <a:schemeClr val="accent1">
+                  <a:lumMod val="85000"/>
+                </a:schemeClr>
+              </a:gs>
+            </a:gsLst>
+            <a:lin ang="5400000" scaled="1"/>
+          </a:gradFill>
+        </p:spPr>
+        <p:style>
+          <a:lnRef idx="2">
+            <a:schemeClr val="accent1">
+              <a:lumMod val="75000"/>
+            </a:schemeClr>
+          </a:lnRef>
+          <a:fillRef idx="1">
+            <a:schemeClr val="accent1"/>
+          </a:fillRef>
+          <a:effectRef idx="0">
+            <a:srgbClr val="FFFFFF"/>
+          </a:effectRef>
+          <a:fontRef idx="minor">
+            <a:schemeClr val="lt1"/>
+          </a:fontRef>
+        </p:style>
+        <p:txBody>
+          <a:bodyPr rtlCol="0" anchor="ctr"/>
+          <a:p>
+            <a:pPr algn="ctr"/>
+            <a:endParaRPr lang="zh-CN" altLang="en-US"/>
+          </a:p>
+        </p:txBody>
+      </p:sp>
+      <p:sp>
+        <p:nvSpPr>
+          <p:cNvPr id="58" name="下箭头 57"/>
+          <p:cNvSpPr/>
+          <p:nvPr/>
+        </p:nvSpPr>
+        <p:spPr>
+          <a:xfrm>
+            <a:off x="4728210" y="5535295"/>
+            <a:ext cx="396875" cy="396875"/>
+          </a:xfrm>
+          <a:prstGeom prst="downArrow">
+            <a:avLst/>
+          </a:prstGeom>
+          <a:gradFill>
+            <a:gsLst>
+              <a:gs pos="50000">
+                <a:schemeClr val="accent1"/>
+              </a:gs>
+              <a:gs pos="0">
+                <a:schemeClr val="accent1">
+                  <a:lumMod val="25000"/>
+                  <a:lumOff val="75000"/>
+                </a:schemeClr>
+              </a:gs>
+              <a:gs pos="100000">
+                <a:schemeClr val="accent1">
+                  <a:lumMod val="85000"/>
+                </a:schemeClr>
+              </a:gs>
+            </a:gsLst>
+            <a:lin ang="5400000" scaled="1"/>
+          </a:gradFill>
+        </p:spPr>
+        <p:style>
+          <a:lnRef idx="2">
+            <a:schemeClr val="accent1">
+              <a:lumMod val="75000"/>
+            </a:schemeClr>
+          </a:lnRef>
+          <a:fillRef idx="1">
+            <a:schemeClr val="accent1"/>
+          </a:fillRef>
+          <a:effectRef idx="0">
+            <a:srgbClr val="FFFFFF"/>
+          </a:effectRef>
+          <a:fontRef idx="minor">
+            <a:schemeClr val="lt1"/>
+          </a:fontRef>
+        </p:style>
+        <p:txBody>
+          <a:bodyPr rtlCol="0" anchor="ctr"/>
+          <a:p>
+            <a:pPr algn="ctr"/>
+            <a:endParaRPr lang="zh-CN" altLang="en-US"/>
+          </a:p>
+        </p:txBody>
+      </p:sp>
+      <p:sp>
+        <p:nvSpPr>
+          <p:cNvPr id="59" name="下箭头 58"/>
+          <p:cNvSpPr/>
+          <p:nvPr/>
+        </p:nvSpPr>
+        <p:spPr>
+          <a:xfrm>
+            <a:off x="6443345" y="5558155"/>
+            <a:ext cx="396875" cy="396875"/>
+          </a:xfrm>
+          <a:prstGeom prst="downArrow">
+            <a:avLst/>
+          </a:prstGeom>
+          <a:gradFill>
+            <a:gsLst>
+              <a:gs pos="50000">
+                <a:schemeClr val="accent1"/>
+              </a:gs>
+              <a:gs pos="0">
+                <a:schemeClr val="accent1">
+                  <a:lumMod val="25000"/>
+                  <a:lumOff val="75000"/>
+                </a:schemeClr>
+              </a:gs>
+              <a:gs pos="100000">
+                <a:schemeClr val="accent1">
+                  <a:lumMod val="85000"/>
+                </a:schemeClr>
+              </a:gs>
+            </a:gsLst>
+            <a:lin ang="5400000" scaled="1"/>
+          </a:gradFill>
+        </p:spPr>
+        <p:style>
+          <a:lnRef idx="2">
+            <a:schemeClr val="accent1">
+              <a:lumMod val="75000"/>
+            </a:schemeClr>
+          </a:lnRef>
+          <a:fillRef idx="1">
+            <a:schemeClr val="accent1"/>
+          </a:fillRef>
+          <a:effectRef idx="0">
+            <a:srgbClr val="FFFFFF"/>
+          </a:effectRef>
+          <a:fontRef idx="minor">
+            <a:schemeClr val="lt1"/>
+          </a:fontRef>
+        </p:style>
+        <p:txBody>
+          <a:bodyPr rtlCol="0" anchor="ctr"/>
+          <a:p>
+            <a:pPr algn="ctr"/>
+            <a:endParaRPr lang="zh-CN" altLang="en-US"/>
+          </a:p>
+        </p:txBody>
+      </p:sp>
+      <p:sp>
+        <p:nvSpPr>
+          <p:cNvPr id="60" name="下箭头 59"/>
+          <p:cNvSpPr/>
+          <p:nvPr/>
+        </p:nvSpPr>
+        <p:spPr>
+          <a:xfrm>
+            <a:off x="8158480" y="5535295"/>
+            <a:ext cx="396875" cy="396875"/>
+          </a:xfrm>
+          <a:prstGeom prst="downArrow">
+            <a:avLst/>
+          </a:prstGeom>
+          <a:gradFill>
+            <a:gsLst>
+              <a:gs pos="50000">
+                <a:schemeClr val="accent1"/>
+              </a:gs>
+              <a:gs pos="0">
+                <a:schemeClr val="accent1">
+                  <a:lumMod val="25000"/>
+                  <a:lumOff val="75000"/>
+                </a:schemeClr>
+              </a:gs>
+              <a:gs pos="100000">
+                <a:schemeClr val="accent1">
+                  <a:lumMod val="85000"/>
+                </a:schemeClr>
+              </a:gs>
+            </a:gsLst>
+            <a:lin ang="5400000" scaled="1"/>
+          </a:gradFill>
+        </p:spPr>
+        <p:style>
+          <a:lnRef idx="2">
+            <a:schemeClr val="accent1">
+              <a:lumMod val="75000"/>
+            </a:schemeClr>
+          </a:lnRef>
+          <a:fillRef idx="1">
+            <a:schemeClr val="accent1"/>
+          </a:fillRef>
+          <a:effectRef idx="0">
+            <a:srgbClr val="FFFFFF"/>
+          </a:effectRef>
+          <a:fontRef idx="minor">
+            <a:schemeClr val="lt1"/>
+          </a:fontRef>
+        </p:style>
+        <p:txBody>
+          <a:bodyPr rtlCol="0" anchor="ctr"/>
+          <a:p>
+            <a:pPr algn="ctr"/>
+            <a:endParaRPr lang="zh-CN" altLang="en-US"/>
+          </a:p>
+        </p:txBody>
+      </p:sp>
+      <p:sp>
+        <p:nvSpPr>
+          <p:cNvPr id="61" name="矩形 60"/>
+          <p:cNvSpPr/>
+          <p:nvPr/>
+        </p:nvSpPr>
+        <p:spPr>
+          <a:xfrm>
+            <a:off x="2312035" y="5963285"/>
+            <a:ext cx="6900545" cy="655955"/>
+          </a:xfrm>
+          <a:prstGeom prst="rect">
+            <a:avLst/>
+          </a:prstGeom>
+          <a:noFill/>
+          <a:ln>
+            <a:solidFill>
+              <a:schemeClr val="tx1"/>
+            </a:solidFill>
+          </a:ln>
+        </p:spPr>
+        <p:style>
+          <a:lnRef idx="2">
+            <a:schemeClr val="accent1">
+              <a:lumMod val="75000"/>
+            </a:schemeClr>
+          </a:lnRef>
+          <a:fillRef idx="1">
+            <a:schemeClr val="accent1"/>
+          </a:fillRef>
+          <a:effectRef idx="0">
+            <a:srgbClr val="FFFFFF"/>
+          </a:effectRef>
+          <a:fontRef idx="minor">
+            <a:schemeClr val="lt1"/>
+          </a:fontRef>
+        </p:style>
+        <p:txBody>
+          <a:bodyPr rtlCol="0" anchor="ctr"/>
+          <a:p>
+            <a:pPr algn="ctr"/>
+            <a:endParaRPr lang="zh-CN" altLang="en-US"/>
+          </a:p>
+        </p:txBody>
+      </p:sp>
+      <p:sp>
+        <p:nvSpPr>
+          <p:cNvPr id="62" name="文本框 61"/>
           <p:cNvSpPr txBox="1"/>
           <p:nvPr/>
         </p:nvSpPr>
         <p:spPr>
           <a:xfrm>
-            <a:off x="1362075" y="1506220"/>
-            <a:ext cx="1078230" cy="337185"/>
+            <a:off x="2370455" y="6021705"/>
+            <a:ext cx="6682105" cy="583565"/>
           </a:xfrm>
           <a:prstGeom prst="rect">
             <a:avLst/>
@@ -3503,48 +5164,24 @@
             <a:spAutoFit/>
           </a:bodyPr>
           <a:p>
+            <a:pPr algn="ctr"/>
             <a:r>
               <a:rPr lang="zh-CN" altLang="en-US" sz="1600" b="1"/>
-              <a:t>研究</a:t>
+              <a:t>构建感知</a:t>
+            </a:r>
+            <a:r>
+              <a:rPr lang="en-US" altLang="zh-CN" sz="1600" b="1"/>
+              <a:t>-</a:t>
             </a:r>
             <a:r>
               <a:rPr lang="zh-CN" altLang="en-US" sz="1600" b="1"/>
-              <a:t>场景</a:t>
-            </a:r>
-            <a:endParaRPr lang="zh-CN" altLang="en-US" sz="1600" b="1"/>
-          </a:p>
-        </p:txBody>
-      </p:sp>
-      <p:sp>
-        <p:nvSpPr>
-          <p:cNvPr id="8" name="文本框 7"/>
-          <p:cNvSpPr txBox="1"/>
-          <p:nvPr/>
-        </p:nvSpPr>
-        <p:spPr>
-          <a:xfrm>
-            <a:off x="1362075" y="1843405"/>
-            <a:ext cx="1078230" cy="583565"/>
-          </a:xfrm>
-          <a:prstGeom prst="rect">
-            <a:avLst/>
-          </a:prstGeom>
-        </p:spPr>
-        <p:txBody>
-          <a:bodyPr wrap="square">
-            <a:spAutoFit/>
-          </a:bodyPr>
-          <a:p>
-            <a:pPr algn="ctr"/>
-            <a:r>
-              <a:rPr lang="zh-CN" altLang="en-US" sz="1600" b="1"/>
-              <a:t>（业务承载</a:t>
-            </a:r>
-            <a:r>
-              <a:rPr lang="zh-CN" altLang="en-US" sz="1600" b="1"/>
-              <a:t>环节）</a:t>
-            </a:r>
-            <a:endParaRPr lang="zh-CN" altLang="en-US" sz="1600" b="1"/>
+              <a:t>决策闭环的分布式管控框架，提升星上自治能力并保障用户级端到端业务 </a:t>
+            </a:r>
+            <a:r>
+              <a:rPr lang="en-US" altLang="zh-CN" sz="1600" b="1"/>
+              <a:t>QoS</a:t>
+            </a:r>
+            <a:endParaRPr lang="en-US" altLang="zh-CN" sz="1600" b="1"/>
           </a:p>
         </p:txBody>
       </p:sp>

--- a/figures/ppt/研究体系.pptx
+++ b/figures/ppt/研究体系.pptx
@@ -110,12 +110,12 @@
   <p:extLst>
     <p:ext uri="{EFAFB233-063F-42B5-8137-9DF3F51BA10A}">
       <p15:sldGuideLst xmlns:p15="http://schemas.microsoft.com/office/powerpoint/2012/main">
-        <p15:guide id="1" orient="horz" pos="2160" userDrawn="1">
+        <p15:guide id="1" orient="horz" pos="2178" userDrawn="1">
           <p15:clr>
             <a:srgbClr val="A4A3A4"/>
           </p15:clr>
         </p15:guide>
-        <p15:guide id="2" pos="3840" userDrawn="1">
+        <p15:guide id="2" pos="3813" userDrawn="1">
           <p15:clr>
             <a:srgbClr val="A4A3A4"/>
           </p15:clr>
@@ -3336,7 +3336,7 @@
         </p:nvSpPr>
         <p:spPr>
           <a:xfrm>
-            <a:off x="2789555" y="842645"/>
+            <a:off x="2981325" y="235585"/>
             <a:ext cx="5760720" cy="454025"/>
           </a:xfrm>
           <a:prstGeom prst="rect">
@@ -3381,7 +3381,7 @@
         </p:nvSpPr>
         <p:spPr>
           <a:xfrm>
-            <a:off x="3237865" y="884555"/>
+            <a:off x="3429635" y="277495"/>
             <a:ext cx="4863465" cy="337185"/>
           </a:xfrm>
           <a:prstGeom prst="rect">
@@ -3419,7 +3419,11 @@
             </a:r>
             <a:r>
               <a:rPr lang="zh-CN" altLang="en-US" sz="1600" b="1"/>
-              <a:t>分布式协同资源管控研究</a:t>
+              <a:t>分布式</a:t>
+            </a:r>
+            <a:r>
+              <a:rPr lang="zh-CN" altLang="en-US" sz="1600" b="1"/>
+              <a:t>智能资源管控研究</a:t>
             </a:r>
             <a:endParaRPr lang="zh-CN" altLang="en-US" sz="1600" b="1"/>
           </a:p>
@@ -3433,7 +3437,7 @@
         </p:nvSpPr>
         <p:spPr>
           <a:xfrm>
-            <a:off x="475615" y="1814195"/>
+            <a:off x="667385" y="1207135"/>
             <a:ext cx="1863725" cy="583565"/>
           </a:xfrm>
           <a:prstGeom prst="rect">
@@ -3478,7 +3482,7 @@
         </p:nvSpPr>
         <p:spPr>
           <a:xfrm>
-            <a:off x="2789555" y="1769745"/>
+            <a:off x="2981325" y="1162685"/>
             <a:ext cx="5760720" cy="691515"/>
           </a:xfrm>
           <a:prstGeom prst="rect">
@@ -3523,7 +3527,7 @@
         </p:nvSpPr>
         <p:spPr>
           <a:xfrm>
-            <a:off x="3430270" y="1769745"/>
+            <a:off x="3622040" y="1162685"/>
             <a:ext cx="4863465" cy="337185"/>
           </a:xfrm>
           <a:prstGeom prst="rect">
@@ -3563,7 +3567,7 @@
         </p:nvSpPr>
         <p:spPr>
           <a:xfrm>
-            <a:off x="3237865" y="2089785"/>
+            <a:off x="3429635" y="1482725"/>
             <a:ext cx="4863465" cy="337185"/>
           </a:xfrm>
           <a:prstGeom prst="rect">
@@ -3654,7 +3658,7 @@
         </p:nvSpPr>
         <p:spPr>
           <a:xfrm>
-            <a:off x="1059180" y="3355975"/>
+            <a:off x="953135" y="2748915"/>
             <a:ext cx="1294130" cy="337185"/>
           </a:xfrm>
           <a:prstGeom prst="rect">
@@ -3686,7 +3690,7 @@
         </p:nvSpPr>
         <p:spPr>
           <a:xfrm>
-            <a:off x="2461260" y="2988945"/>
+            <a:off x="2653030" y="2381885"/>
             <a:ext cx="1586230" cy="1065530"/>
           </a:xfrm>
           <a:prstGeom prst="rect">
@@ -3731,7 +3735,7 @@
         </p:nvSpPr>
         <p:spPr>
           <a:xfrm>
-            <a:off x="2398395" y="2988945"/>
+            <a:off x="2590165" y="2381885"/>
             <a:ext cx="1734820" cy="1076325"/>
           </a:xfrm>
           <a:prstGeom prst="rect">
@@ -3765,7 +3769,7 @@
         </p:nvGrpSpPr>
         <p:grpSpPr>
           <a:xfrm>
-            <a:off x="4046855" y="2988945"/>
+            <a:off x="4238625" y="2381885"/>
             <a:ext cx="1734820" cy="1065530"/>
             <a:chOff x="8434" y="7576"/>
             <a:chExt cx="2732" cy="1678"/>
@@ -3859,7 +3863,7 @@
         </p:nvGrpSpPr>
         <p:grpSpPr>
           <a:xfrm>
-            <a:off x="5774055" y="2988945"/>
+            <a:off x="5965825" y="2381885"/>
             <a:ext cx="1734820" cy="1065530"/>
             <a:chOff x="8456" y="7576"/>
             <a:chExt cx="2732" cy="1678"/>
@@ -3969,7 +3973,7 @@
         </p:nvGrpSpPr>
         <p:grpSpPr>
           <a:xfrm>
-            <a:off x="7494270" y="2988945"/>
+            <a:off x="7686040" y="2381885"/>
             <a:ext cx="1734820" cy="1148080"/>
             <a:chOff x="8467" y="7576"/>
             <a:chExt cx="2732" cy="1808"/>
@@ -3999,7 +4003,15 @@
               <a:pPr algn="ctr"/>
               <a:r>
                 <a:rPr lang="zh-CN" altLang="en-US" sz="1600"/>
-                <a:t>星上硬件与时延约束使传统语义编码与恢复不</a:t>
+                <a:t>星上硬件与时延约束使传统语义编码与恢复</a:t>
+              </a:r>
+              <a:endParaRPr lang="zh-CN" altLang="en-US" sz="1600"/>
+            </a:p>
+            <a:p>
+              <a:pPr algn="ctr"/>
+              <a:r>
+                <a:rPr lang="zh-CN" altLang="en-US" sz="1600"/>
+                <a:t>不</a:t>
               </a:r>
               <a:r>
                 <a:rPr lang="zh-CN" altLang="en-US" sz="1600"/>
@@ -4063,8 +4075,8 @@
         </p:nvSpPr>
         <p:spPr>
           <a:xfrm>
-            <a:off x="1241425" y="4688840"/>
-            <a:ext cx="1042035" cy="337185"/>
+            <a:off x="695960" y="4307205"/>
+            <a:ext cx="1807845" cy="583565"/>
           </a:xfrm>
           <a:prstGeom prst="rect">
             <a:avLst/>
@@ -4075,6 +4087,7 @@
             <a:spAutoFit/>
           </a:bodyPr>
           <a:p>
+            <a:pPr algn="ctr"/>
             <a:r>
               <a:rPr lang="zh-CN" altLang="en-US" sz="1600" b="1"/>
               <a:t>研究</a:t>
@@ -4082,6 +4095,26 @@
             <a:r>
               <a:rPr lang="zh-CN" altLang="en-US" sz="1600" b="1"/>
               <a:t>内容</a:t>
+            </a:r>
+            <a:endParaRPr lang="zh-CN" altLang="en-US" sz="1600" b="1"/>
+          </a:p>
+          <a:p>
+            <a:pPr algn="ctr"/>
+            <a:r>
+              <a:rPr lang="zh-CN" altLang="en-US" sz="1600" b="1"/>
+              <a:t>（感知</a:t>
+            </a:r>
+            <a:r>
+              <a:rPr lang="en-US" altLang="zh-CN" sz="1600" b="1"/>
+              <a:t>-</a:t>
+            </a:r>
+            <a:r>
+              <a:rPr lang="zh-CN" altLang="en-US" sz="1600" b="1"/>
+              <a:t>决策</a:t>
+            </a:r>
+            <a:r>
+              <a:rPr lang="zh-CN" altLang="en-US" sz="1600" b="1"/>
+              <a:t>闭环）</a:t>
             </a:r>
             <a:endParaRPr lang="zh-CN" altLang="en-US" sz="1600" b="1"/>
           </a:p>
@@ -4095,7 +4128,7 @@
         </p:nvGrpSpPr>
         <p:grpSpPr>
           <a:xfrm>
-            <a:off x="2370455" y="4378325"/>
+            <a:off x="2562225" y="4099560"/>
             <a:ext cx="1734820" cy="1065530"/>
             <a:chOff x="8401" y="7576"/>
             <a:chExt cx="2732" cy="1678"/>
@@ -4187,7 +4220,7 @@
         </p:nvCxnSpPr>
         <p:spPr>
           <a:xfrm flipH="1">
-            <a:off x="3265805" y="2468880"/>
+            <a:off x="3457575" y="1861820"/>
             <a:ext cx="0" cy="520065"/>
           </a:xfrm>
           <a:prstGeom prst="straightConnector1">
@@ -4220,7 +4253,7 @@
         </p:nvCxnSpPr>
         <p:spPr>
           <a:xfrm flipH="1">
-            <a:off x="4909820" y="2447925"/>
+            <a:off x="5101590" y="1840865"/>
             <a:ext cx="0" cy="520065"/>
           </a:xfrm>
           <a:prstGeom prst="straightConnector1">
@@ -4253,7 +4286,7 @@
         </p:nvCxnSpPr>
         <p:spPr>
           <a:xfrm flipH="1">
-            <a:off x="6623050" y="2465070"/>
+            <a:off x="6814820" y="1858010"/>
             <a:ext cx="0" cy="520065"/>
           </a:xfrm>
           <a:prstGeom prst="straightConnector1">
@@ -4286,41 +4319,8 @@
         </p:nvCxnSpPr>
         <p:spPr>
           <a:xfrm flipH="1">
-            <a:off x="8336280" y="2447925"/>
+            <a:off x="8528050" y="1840865"/>
             <a:ext cx="0" cy="520065"/>
-          </a:xfrm>
-          <a:prstGeom prst="straightConnector1">
-            <a:avLst/>
-          </a:prstGeom>
-          <a:ln w="22225">
-            <a:tailEnd type="arrow"/>
-          </a:ln>
-        </p:spPr>
-        <p:style>
-          <a:lnRef idx="2">
-            <a:schemeClr val="accent1"/>
-          </a:lnRef>
-          <a:fillRef idx="0">
-            <a:srgbClr val="FFFFFF"/>
-          </a:fillRef>
-          <a:effectRef idx="0">
-            <a:srgbClr val="FFFFFF"/>
-          </a:effectRef>
-          <a:fontRef idx="minor">
-            <a:schemeClr val="tx1"/>
-          </a:fontRef>
-        </p:style>
-      </p:cxnSp>
-      <p:cxnSp>
-        <p:nvCxnSpPr>
-          <p:cNvPr id="42" name="直接箭头连接符 41"/>
-          <p:cNvCxnSpPr/>
-          <p:nvPr/>
-        </p:nvCxnSpPr>
-        <p:spPr>
-          <a:xfrm flipH="1">
-            <a:off x="3328670" y="4066540"/>
-            <a:ext cx="0" cy="320675"/>
           </a:xfrm>
           <a:prstGeom prst="straightConnector1">
             <a:avLst/>
@@ -4352,7 +4352,7 @@
         </p:nvGrpSpPr>
         <p:grpSpPr>
           <a:xfrm>
-            <a:off x="4042410" y="4387215"/>
+            <a:off x="4234180" y="4108450"/>
             <a:ext cx="1734820" cy="1065530"/>
             <a:chOff x="8401" y="7576"/>
             <a:chExt cx="2732" cy="1678"/>
@@ -4442,7 +4442,7 @@
         </p:nvGrpSpPr>
         <p:grpSpPr>
           <a:xfrm>
-            <a:off x="5741670" y="4387215"/>
+            <a:off x="5933440" y="4108450"/>
             <a:ext cx="1734820" cy="1148080"/>
             <a:chOff x="8401" y="7576"/>
             <a:chExt cx="2732" cy="1808"/>
@@ -4543,46 +4543,15 @@
       <p:cxnSp>
         <p:nvCxnSpPr>
           <p:cNvPr id="49" name="直接箭头连接符 48"/>
-          <p:cNvCxnSpPr/>
+          <p:cNvCxnSpPr>
+            <a:endCxn id="45" idx="0"/>
+          </p:cNvCxnSpPr>
           <p:nvPr/>
         </p:nvCxnSpPr>
         <p:spPr>
-          <a:xfrm flipH="1">
-            <a:off x="4909820" y="4054475"/>
-            <a:ext cx="0" cy="320675"/>
-          </a:xfrm>
-          <a:prstGeom prst="straightConnector1">
-            <a:avLst/>
-          </a:prstGeom>
-          <a:ln w="22225">
-            <a:tailEnd type="arrow"/>
-          </a:ln>
-        </p:spPr>
-        <p:style>
-          <a:lnRef idx="2">
-            <a:schemeClr val="accent1"/>
-          </a:lnRef>
-          <a:fillRef idx="0">
-            <a:srgbClr val="FFFFFF"/>
-          </a:fillRef>
-          <a:effectRef idx="0">
-            <a:srgbClr val="FFFFFF"/>
-          </a:effectRef>
-          <a:fontRef idx="minor">
-            <a:schemeClr val="tx1"/>
-          </a:fontRef>
-        </p:style>
-      </p:cxnSp>
-      <p:cxnSp>
-        <p:nvCxnSpPr>
-          <p:cNvPr id="50" name="直接箭头连接符 49"/>
-          <p:cNvCxnSpPr/>
-          <p:nvPr/>
-        </p:nvCxnSpPr>
-        <p:spPr>
-          <a:xfrm flipH="1">
-            <a:off x="6641465" y="4054475"/>
-            <a:ext cx="0" cy="320675"/>
+          <a:xfrm>
+            <a:off x="5101590" y="3447415"/>
+            <a:ext cx="0" cy="661035"/>
           </a:xfrm>
           <a:prstGeom prst="straightConnector1">
             <a:avLst/>
@@ -4614,7 +4583,7 @@
         </p:nvGrpSpPr>
         <p:grpSpPr>
           <a:xfrm>
-            <a:off x="7478395" y="4387215"/>
+            <a:off x="7670165" y="4108450"/>
             <a:ext cx="1734820" cy="1148080"/>
             <a:chOff x="8401" y="7576"/>
             <a:chExt cx="2732" cy="1808"/>
@@ -4696,39 +4665,6 @@
           </p:txBody>
         </p:sp>
       </p:grpSp>
-      <p:cxnSp>
-        <p:nvCxnSpPr>
-          <p:cNvPr id="54" name="直接箭头连接符 53"/>
-          <p:cNvCxnSpPr/>
-          <p:nvPr/>
-        </p:nvCxnSpPr>
-        <p:spPr>
-          <a:xfrm flipH="1">
-            <a:off x="8373110" y="4054475"/>
-            <a:ext cx="0" cy="320675"/>
-          </a:xfrm>
-          <a:prstGeom prst="straightConnector1">
-            <a:avLst/>
-          </a:prstGeom>
-          <a:ln w="22225">
-            <a:tailEnd type="arrow"/>
-          </a:ln>
-        </p:spPr>
-        <p:style>
-          <a:lnRef idx="2">
-            <a:schemeClr val="accent1"/>
-          </a:lnRef>
-          <a:fillRef idx="0">
-            <a:srgbClr val="FFFFFF"/>
-          </a:fillRef>
-          <a:effectRef idx="0">
-            <a:srgbClr val="FFFFFF"/>
-          </a:effectRef>
-          <a:fontRef idx="minor">
-            <a:schemeClr val="tx1"/>
-          </a:fontRef>
-        </p:style>
-      </p:cxnSp>
       <p:sp>
         <p:nvSpPr>
           <p:cNvPr id="55" name="文本框 54"/>
@@ -4737,7 +4673,7 @@
         </p:nvSpPr>
         <p:spPr>
           <a:xfrm>
-            <a:off x="1205865" y="5955030"/>
+            <a:off x="1078230" y="5653405"/>
             <a:ext cx="1042035" cy="337185"/>
           </a:xfrm>
           <a:prstGeom prst="rect">
@@ -4769,8 +4705,8 @@
         </p:nvSpPr>
         <p:spPr>
           <a:xfrm>
-            <a:off x="2338705" y="1647190"/>
-            <a:ext cx="6890385" cy="3965575"/>
+            <a:off x="2530475" y="1040130"/>
+            <a:ext cx="6890385" cy="4294505"/>
           </a:xfrm>
           <a:prstGeom prst="rect">
             <a:avLst/>
@@ -4817,7 +4753,7 @@
         </p:nvSpPr>
         <p:spPr>
           <a:xfrm>
-            <a:off x="5377180" y="1334770"/>
+            <a:off x="5568950" y="727710"/>
             <a:ext cx="396875" cy="396875"/>
           </a:xfrm>
           <a:prstGeom prst="downArrow">
@@ -4875,7 +4811,7 @@
         </p:nvSpPr>
         <p:spPr>
           <a:xfrm>
-            <a:off x="3129915" y="5535295"/>
+            <a:off x="3321685" y="5256530"/>
             <a:ext cx="396875" cy="396875"/>
           </a:xfrm>
           <a:prstGeom prst="downArrow">
@@ -4933,7 +4869,7 @@
         </p:nvSpPr>
         <p:spPr>
           <a:xfrm>
-            <a:off x="4728210" y="5535295"/>
+            <a:off x="4919980" y="5256530"/>
             <a:ext cx="396875" cy="396875"/>
           </a:xfrm>
           <a:prstGeom prst="downArrow">
@@ -4991,7 +4927,7 @@
         </p:nvSpPr>
         <p:spPr>
           <a:xfrm>
-            <a:off x="6443345" y="5558155"/>
+            <a:off x="6635115" y="5279390"/>
             <a:ext cx="396875" cy="396875"/>
           </a:xfrm>
           <a:prstGeom prst="downArrow">
@@ -5049,7 +4985,7 @@
         </p:nvSpPr>
         <p:spPr>
           <a:xfrm>
-            <a:off x="8158480" y="5535295"/>
+            <a:off x="8350250" y="5256530"/>
             <a:ext cx="396875" cy="396875"/>
           </a:xfrm>
           <a:prstGeom prst="downArrow">
@@ -5107,7 +5043,7 @@
         </p:nvSpPr>
         <p:spPr>
           <a:xfrm>
-            <a:off x="2312035" y="5963285"/>
+            <a:off x="2503805" y="5684520"/>
             <a:ext cx="6900545" cy="655955"/>
           </a:xfrm>
           <a:prstGeom prst="rect">
@@ -5152,7 +5088,7 @@
         </p:nvSpPr>
         <p:spPr>
           <a:xfrm>
-            <a:off x="2370455" y="6021705"/>
+            <a:off x="2562225" y="5742940"/>
             <a:ext cx="6682105" cy="583565"/>
           </a:xfrm>
           <a:prstGeom prst="rect">
@@ -5175,7 +5111,11 @@
             </a:r>
             <a:r>
               <a:rPr lang="zh-CN" altLang="en-US" sz="1600" b="1"/>
-              <a:t>决策闭环的分布式管控框架，提升星上自治能力并保障用户级端到端业务 </a:t>
+              <a:t>决策闭环的分布式管控框架，提升在轨自适应资源分配</a:t>
+            </a:r>
+            <a:r>
+              <a:rPr lang="zh-CN" altLang="en-US" sz="1600" b="1"/>
+              <a:t>能力并保障用户级端到端业务 </a:t>
             </a:r>
             <a:r>
               <a:rPr lang="en-US" altLang="zh-CN" sz="1600" b="1"/>
@@ -5185,6 +5125,251 @@
           </a:p>
         </p:txBody>
       </p:sp>
+      <p:sp>
+        <p:nvSpPr>
+          <p:cNvPr id="2" name="矩形 1"/>
+          <p:cNvSpPr/>
+          <p:nvPr/>
+        </p:nvSpPr>
+        <p:spPr>
+          <a:xfrm>
+            <a:off x="4272280" y="4005580"/>
+            <a:ext cx="5112385" cy="1243330"/>
+          </a:xfrm>
+          <a:prstGeom prst="rect">
+            <a:avLst/>
+          </a:prstGeom>
+          <a:noFill/>
+          <a:ln>
+            <a:solidFill>
+              <a:srgbClr val="C00000"/>
+            </a:solidFill>
+          </a:ln>
+        </p:spPr>
+        <p:style>
+          <a:lnRef idx="2">
+            <a:schemeClr val="accent1">
+              <a:lumMod val="75000"/>
+            </a:schemeClr>
+          </a:lnRef>
+          <a:fillRef idx="1">
+            <a:schemeClr val="accent1"/>
+          </a:fillRef>
+          <a:effectRef idx="0">
+            <a:srgbClr val="FFFFFF"/>
+          </a:effectRef>
+          <a:fontRef idx="minor">
+            <a:schemeClr val="lt1"/>
+          </a:fontRef>
+        </p:style>
+        <p:txBody>
+          <a:bodyPr rtlCol="0" anchor="ctr"/>
+          <a:p>
+            <a:pPr algn="ctr"/>
+            <a:endParaRPr lang="zh-CN" altLang="en-US"/>
+          </a:p>
+        </p:txBody>
+      </p:sp>
+      <p:sp>
+        <p:nvSpPr>
+          <p:cNvPr id="3" name="环形箭头 2"/>
+          <p:cNvSpPr/>
+          <p:nvPr/>
+        </p:nvSpPr>
+        <p:spPr>
+          <a:xfrm>
+            <a:off x="4003040" y="3768090"/>
+            <a:ext cx="409575" cy="497205"/>
+          </a:xfrm>
+          <a:prstGeom prst="circularArrow">
+            <a:avLst/>
+          </a:prstGeom>
+          <a:gradFill>
+            <a:gsLst>
+              <a:gs pos="51300">
+                <a:srgbClr val="FE5F4A"/>
+              </a:gs>
+              <a:gs pos="0">
+                <a:srgbClr val="DF0303"/>
+              </a:gs>
+              <a:gs pos="100000">
+                <a:srgbClr val="FEA06E"/>
+              </a:gs>
+            </a:gsLst>
+            <a:lin ang="5400000" scaled="1"/>
+          </a:gradFill>
+          <a:ln>
+            <a:solidFill>
+              <a:schemeClr val="bg1">
+                <a:lumMod val="50000"/>
+              </a:schemeClr>
+            </a:solidFill>
+          </a:ln>
+        </p:spPr>
+        <p:style>
+          <a:lnRef idx="2">
+            <a:schemeClr val="accent1">
+              <a:lumMod val="75000"/>
+            </a:schemeClr>
+          </a:lnRef>
+          <a:fillRef idx="1">
+            <a:schemeClr val="accent1"/>
+          </a:fillRef>
+          <a:effectRef idx="0">
+            <a:srgbClr val="FFFFFF"/>
+          </a:effectRef>
+          <a:fontRef idx="minor">
+            <a:schemeClr val="lt1"/>
+          </a:fontRef>
+        </p:style>
+        <p:txBody>
+          <a:bodyPr rtlCol="0" anchor="ctr"/>
+          <a:p>
+            <a:pPr algn="ctr"/>
+            <a:endParaRPr lang="zh-CN" altLang="en-US">
+              <a:solidFill>
+                <a:schemeClr val="tx1"/>
+              </a:solidFill>
+            </a:endParaRPr>
+          </a:p>
+        </p:txBody>
+      </p:sp>
+      <p:sp>
+        <p:nvSpPr>
+          <p:cNvPr id="8" name="文本框 7"/>
+          <p:cNvSpPr txBox="1"/>
+          <p:nvPr/>
+        </p:nvSpPr>
+        <p:spPr>
+          <a:xfrm>
+            <a:off x="3576320" y="3430905"/>
+            <a:ext cx="1294130" cy="460375"/>
+          </a:xfrm>
+          <a:prstGeom prst="rect">
+            <a:avLst/>
+          </a:prstGeom>
+        </p:spPr>
+        <p:txBody>
+          <a:bodyPr wrap="square">
+            <a:spAutoFit/>
+          </a:bodyPr>
+          <a:p>
+            <a:pPr algn="ctr"/>
+            <a:r>
+              <a:rPr lang="zh-CN" altLang="en-US" sz="1200" b="1"/>
+              <a:t>面向协作</a:t>
+            </a:r>
+            <a:endParaRPr lang="zh-CN" altLang="en-US" sz="1200" b="1"/>
+          </a:p>
+          <a:p>
+            <a:pPr algn="ctr"/>
+            <a:r>
+              <a:rPr lang="zh-CN" altLang="en-US" sz="1200" b="1"/>
+              <a:t>提供感知能力</a:t>
+            </a:r>
+            <a:endParaRPr lang="zh-CN" altLang="en-US" sz="1200" b="1"/>
+          </a:p>
+        </p:txBody>
+      </p:sp>
+      <p:cxnSp>
+        <p:nvCxnSpPr>
+          <p:cNvPr id="14" name="直接箭头连接符 13"/>
+          <p:cNvCxnSpPr/>
+          <p:nvPr/>
+        </p:nvCxnSpPr>
+        <p:spPr>
+          <a:xfrm>
+            <a:off x="3519805" y="3430905"/>
+            <a:ext cx="0" cy="661035"/>
+          </a:xfrm>
+          <a:prstGeom prst="straightConnector1">
+            <a:avLst/>
+          </a:prstGeom>
+          <a:ln w="22225">
+            <a:tailEnd type="arrow"/>
+          </a:ln>
+        </p:spPr>
+        <p:style>
+          <a:lnRef idx="2">
+            <a:schemeClr val="accent1"/>
+          </a:lnRef>
+          <a:fillRef idx="0">
+            <a:srgbClr val="FFFFFF"/>
+          </a:fillRef>
+          <a:effectRef idx="0">
+            <a:srgbClr val="FFFFFF"/>
+          </a:effectRef>
+          <a:fontRef idx="minor">
+            <a:schemeClr val="tx1"/>
+          </a:fontRef>
+        </p:style>
+      </p:cxnSp>
+      <p:cxnSp>
+        <p:nvCxnSpPr>
+          <p:cNvPr id="15" name="直接箭头连接符 14"/>
+          <p:cNvCxnSpPr/>
+          <p:nvPr/>
+        </p:nvCxnSpPr>
+        <p:spPr>
+          <a:xfrm>
+            <a:off x="6814820" y="3458210"/>
+            <a:ext cx="0" cy="661035"/>
+          </a:xfrm>
+          <a:prstGeom prst="straightConnector1">
+            <a:avLst/>
+          </a:prstGeom>
+          <a:ln w="22225">
+            <a:tailEnd type="arrow"/>
+          </a:ln>
+        </p:spPr>
+        <p:style>
+          <a:lnRef idx="2">
+            <a:schemeClr val="accent1"/>
+          </a:lnRef>
+          <a:fillRef idx="0">
+            <a:srgbClr val="FFFFFF"/>
+          </a:fillRef>
+          <a:effectRef idx="0">
+            <a:srgbClr val="FFFFFF"/>
+          </a:effectRef>
+          <a:fontRef idx="minor">
+            <a:schemeClr val="tx1"/>
+          </a:fontRef>
+        </p:style>
+      </p:cxnSp>
+      <p:cxnSp>
+        <p:nvCxnSpPr>
+          <p:cNvPr id="17" name="直接箭头连接符 16"/>
+          <p:cNvCxnSpPr/>
+          <p:nvPr/>
+        </p:nvCxnSpPr>
+        <p:spPr>
+          <a:xfrm>
+            <a:off x="8554085" y="3458210"/>
+            <a:ext cx="0" cy="661035"/>
+          </a:xfrm>
+          <a:prstGeom prst="straightConnector1">
+            <a:avLst/>
+          </a:prstGeom>
+          <a:ln w="22225">
+            <a:tailEnd type="arrow"/>
+          </a:ln>
+        </p:spPr>
+        <p:style>
+          <a:lnRef idx="2">
+            <a:schemeClr val="accent1"/>
+          </a:lnRef>
+          <a:fillRef idx="0">
+            <a:srgbClr val="FFFFFF"/>
+          </a:fillRef>
+          <a:effectRef idx="0">
+            <a:srgbClr val="FFFFFF"/>
+          </a:effectRef>
+          <a:fontRef idx="minor">
+            <a:schemeClr val="tx1"/>
+          </a:fontRef>
+        </p:style>
+      </p:cxnSp>
     </p:spTree>
   </p:cSld>
   <p:clrMapOvr>
